--- a/docs/presentations/Selket_Investor_Deck.pptx
+++ b/docs/presentations/Selket_Investor_Deck.pptx
@@ -3113,7 +3113,7 @@
             <a:avLst/>
           </a:prstGeom>
           <a:solidFill>
-            <a:srgbClr val="18233A"/>
+            <a:srgbClr val="78350F"/>
           </a:solidFill>
           <a:ln>
             <a:noFill/>
@@ -3157,7 +3157,7 @@
             <a:avLst/>
           </a:prstGeom>
           <a:solidFill>
-            <a:srgbClr val="21304A"/>
+            <a:srgbClr val="92400E"/>
           </a:solidFill>
           <a:ln>
             <a:noFill/>
@@ -3258,7 +3258,7 @@
             <a:r>
               <a:rPr sz="2200" b="1">
                 <a:solidFill>
-                  <a:srgbClr val="283C5D"/>
+                  <a:srgbClr val="B45309"/>
                 </a:solidFill>
                 <a:latin typeface="Calibri"/>
               </a:rPr>
@@ -3319,7 +3319,7 @@
             </a:avLst>
           </a:prstGeom>
           <a:solidFill>
-            <a:srgbClr val="283C5D"/>
+            <a:srgbClr val="B45309"/>
           </a:solidFill>
           <a:ln>
             <a:noFill/>
@@ -3374,7 +3374,7 @@
             <a:r>
               <a:rPr sz="1000" b="1">
                 <a:solidFill>
-                  <a:srgbClr val="D6E0EE"/>
+                  <a:srgbClr val="FEF3C7"/>
                 </a:solidFill>
                 <a:latin typeface="Calibri"/>
               </a:rPr>
@@ -3445,7 +3445,7 @@
             <a:r>
               <a:rPr sz="1800" b="0">
                 <a:solidFill>
-                  <a:srgbClr val="D6E0EE"/>
+                  <a:srgbClr val="FEF3C7"/>
                 </a:solidFill>
                 <a:latin typeface="Calibri"/>
               </a:rPr>
@@ -3481,7 +3481,7 @@
             <a:r>
               <a:rPr sz="1100" b="0">
                 <a:solidFill>
-                  <a:srgbClr val="84A0C6"/>
+                  <a:srgbClr val="FCD34D"/>
                 </a:solidFill>
                 <a:latin typeface="Calibri"/>
               </a:rPr>
@@ -3523,7 +3523,7 @@
             <a:avLst/>
           </a:prstGeom>
           <a:solidFill>
-            <a:srgbClr val="283C5D"/>
+            <a:srgbClr val="B45309"/>
           </a:solidFill>
           <a:ln>
             <a:noFill/>
@@ -3578,7 +3578,7 @@
             <a:r>
               <a:rPr sz="1000" b="1">
                 <a:solidFill>
-                  <a:srgbClr val="283C5D"/>
+                  <a:srgbClr val="B45309"/>
                 </a:solidFill>
                 <a:latin typeface="Calibri"/>
               </a:rPr>
@@ -3757,7 +3757,7 @@
             </a:avLst>
           </a:prstGeom>
           <a:solidFill>
-            <a:srgbClr val="283C5D"/>
+            <a:srgbClr val="B45309"/>
           </a:solidFill>
           <a:ln>
             <a:noFill/>
@@ -3871,7 +3871,7 @@
             <a:avLst/>
           </a:prstGeom>
           <a:solidFill>
-            <a:srgbClr val="283C5D"/>
+            <a:srgbClr val="B45309"/>
           </a:solidFill>
           <a:ln>
             <a:noFill/>
@@ -3949,7 +3949,7 @@
             <a:avLst/>
           </a:prstGeom>
           <a:solidFill>
-            <a:srgbClr val="283C5D"/>
+            <a:srgbClr val="B45309"/>
           </a:solidFill>
           <a:ln>
             <a:noFill/>
@@ -4027,7 +4027,7 @@
             <a:avLst/>
           </a:prstGeom>
           <a:solidFill>
-            <a:srgbClr val="283C5D"/>
+            <a:srgbClr val="B45309"/>
           </a:solidFill>
           <a:ln>
             <a:noFill/>
@@ -4105,7 +4105,7 @@
             <a:avLst/>
           </a:prstGeom>
           <a:solidFill>
-            <a:srgbClr val="283C5D"/>
+            <a:srgbClr val="B45309"/>
           </a:solidFill>
           <a:ln>
             <a:noFill/>
@@ -4183,7 +4183,7 @@
             <a:avLst/>
           </a:prstGeom>
           <a:solidFill>
-            <a:srgbClr val="283C5D"/>
+            <a:srgbClr val="B45309"/>
           </a:solidFill>
           <a:ln>
             <a:noFill/>
@@ -4311,7 +4311,7 @@
             </a:avLst>
           </a:prstGeom>
           <a:solidFill>
-            <a:srgbClr val="3F5E8D"/>
+            <a:srgbClr val="F59E0B"/>
           </a:solidFill>
           <a:ln>
             <a:noFill/>
@@ -4425,7 +4425,7 @@
             <a:avLst/>
           </a:prstGeom>
           <a:solidFill>
-            <a:srgbClr val="3F5E8D"/>
+            <a:srgbClr val="F59E0B"/>
           </a:solidFill>
           <a:ln>
             <a:noFill/>
@@ -4503,7 +4503,7 @@
             <a:avLst/>
           </a:prstGeom>
           <a:solidFill>
-            <a:srgbClr val="3F5E8D"/>
+            <a:srgbClr val="F59E0B"/>
           </a:solidFill>
           <a:ln>
             <a:noFill/>
@@ -4581,7 +4581,7 @@
             <a:avLst/>
           </a:prstGeom>
           <a:solidFill>
-            <a:srgbClr val="3F5E8D"/>
+            <a:srgbClr val="F59E0B"/>
           </a:solidFill>
           <a:ln>
             <a:noFill/>
@@ -4659,7 +4659,7 @@
             <a:avLst/>
           </a:prstGeom>
           <a:solidFill>
-            <a:srgbClr val="3F5E8D"/>
+            <a:srgbClr val="F59E0B"/>
           </a:solidFill>
           <a:ln>
             <a:noFill/>
@@ -4737,7 +4737,7 @@
             <a:avLst/>
           </a:prstGeom>
           <a:solidFill>
-            <a:srgbClr val="3F5E8D"/>
+            <a:srgbClr val="F59E0B"/>
           </a:solidFill>
           <a:ln>
             <a:noFill/>
@@ -4865,7 +4865,7 @@
             </a:avLst>
           </a:prstGeom>
           <a:solidFill>
-            <a:srgbClr val="84A0C6"/>
+            <a:srgbClr val="FCD34D"/>
           </a:solidFill>
           <a:ln>
             <a:noFill/>
@@ -4979,7 +4979,7 @@
             <a:avLst/>
           </a:prstGeom>
           <a:solidFill>
-            <a:srgbClr val="84A0C6"/>
+            <a:srgbClr val="FCD34D"/>
           </a:solidFill>
           <a:ln>
             <a:noFill/>
@@ -5057,7 +5057,7 @@
             <a:avLst/>
           </a:prstGeom>
           <a:solidFill>
-            <a:srgbClr val="84A0C6"/>
+            <a:srgbClr val="FCD34D"/>
           </a:solidFill>
           <a:ln>
             <a:noFill/>
@@ -5135,7 +5135,7 @@
             <a:avLst/>
           </a:prstGeom>
           <a:solidFill>
-            <a:srgbClr val="84A0C6"/>
+            <a:srgbClr val="FCD34D"/>
           </a:solidFill>
           <a:ln>
             <a:noFill/>
@@ -5213,7 +5213,7 @@
             <a:avLst/>
           </a:prstGeom>
           <a:solidFill>
-            <a:srgbClr val="84A0C6"/>
+            <a:srgbClr val="FCD34D"/>
           </a:solidFill>
           <a:ln>
             <a:noFill/>
@@ -5291,7 +5291,7 @@
             <a:avLst/>
           </a:prstGeom>
           <a:solidFill>
-            <a:srgbClr val="84A0C6"/>
+            <a:srgbClr val="FCD34D"/>
           </a:solidFill>
           <a:ln>
             <a:noFill/>
@@ -5387,7 +5387,7 @@
             <a:avLst/>
           </a:prstGeom>
           <a:solidFill>
-            <a:srgbClr val="18233A"/>
+            <a:srgbClr val="78350F"/>
           </a:solidFill>
           <a:ln>
             <a:noFill/>
@@ -5431,7 +5431,7 @@
             <a:avLst/>
           </a:prstGeom>
           <a:solidFill>
-            <a:srgbClr val="21304A"/>
+            <a:srgbClr val="92400E"/>
           </a:solidFill>
           <a:ln>
             <a:noFill/>
@@ -5486,7 +5486,7 @@
             <a:r>
               <a:rPr sz="1400" b="1">
                 <a:solidFill>
-                  <a:srgbClr val="84A0C6"/>
+                  <a:srgbClr val="FCD34D"/>
                 </a:solidFill>
                 <a:latin typeface="Calibri"/>
               </a:rPr>
@@ -5557,7 +5557,7 @@
             <a:r>
               <a:rPr sz="1800" b="0">
                 <a:solidFill>
-                  <a:srgbClr val="D6E0EE"/>
+                  <a:srgbClr val="FEF3C7"/>
                 </a:solidFill>
                 <a:latin typeface="Calibri"/>
               </a:rPr>
@@ -5583,7 +5583,7 @@
             </a:avLst>
           </a:prstGeom>
           <a:solidFill>
-            <a:srgbClr val="283C5D"/>
+            <a:srgbClr val="B45309"/>
           </a:solidFill>
           <a:ln>
             <a:noFill/>
@@ -5638,7 +5638,7 @@
             <a:r>
               <a:rPr sz="1000" b="1">
                 <a:solidFill>
-                  <a:srgbClr val="84A0C6"/>
+                  <a:srgbClr val="FCD34D"/>
                 </a:solidFill>
                 <a:latin typeface="Calibri"/>
               </a:rPr>
@@ -5708,7 +5708,7 @@
             <a:r>
               <a:rPr sz="1200" b="0">
                 <a:solidFill>
-                  <a:srgbClr val="D6E0EE"/>
+                  <a:srgbClr val="FEF3C7"/>
                 </a:solidFill>
                 <a:latin typeface="Consolas"/>
               </a:rPr>
@@ -5750,7 +5750,7 @@
             <a:avLst/>
           </a:prstGeom>
           <a:solidFill>
-            <a:srgbClr val="283C5D"/>
+            <a:srgbClr val="B45309"/>
           </a:solidFill>
           <a:ln>
             <a:noFill/>
@@ -5805,7 +5805,7 @@
             <a:r>
               <a:rPr sz="1000" b="1">
                 <a:solidFill>
-                  <a:srgbClr val="283C5D"/>
+                  <a:srgbClr val="B45309"/>
                 </a:solidFill>
                 <a:latin typeface="Calibri"/>
               </a:rPr>
@@ -6179,7 +6179,7 @@
             <a:avLst/>
           </a:prstGeom>
           <a:solidFill>
-            <a:srgbClr val="283C5D"/>
+            <a:srgbClr val="B45309"/>
           </a:solidFill>
           <a:ln>
             <a:noFill/>
@@ -6376,7 +6376,7 @@
             <a:avLst/>
           </a:prstGeom>
           <a:solidFill>
-            <a:srgbClr val="283C5D"/>
+            <a:srgbClr val="B45309"/>
           </a:solidFill>
           <a:ln>
             <a:noFill/>
@@ -6708,7 +6708,7 @@
             <a:avLst/>
           </a:prstGeom>
           <a:solidFill>
-            <a:srgbClr val="283C5D"/>
+            <a:srgbClr val="B45309"/>
           </a:solidFill>
           <a:ln>
             <a:noFill/>
@@ -6763,7 +6763,7 @@
             <a:r>
               <a:rPr sz="1000" b="1">
                 <a:solidFill>
-                  <a:srgbClr val="283C5D"/>
+                  <a:srgbClr val="B45309"/>
                 </a:solidFill>
                 <a:latin typeface="Calibri"/>
               </a:rPr>
@@ -6894,11 +6894,11 @@
             </a:avLst>
           </a:prstGeom>
           <a:solidFill>
-            <a:srgbClr val="EEF2F8"/>
+            <a:srgbClr val="FFFBEB"/>
           </a:solidFill>
           <a:ln w="9525">
             <a:solidFill>
-              <a:srgbClr val="D6E0EE"/>
+              <a:srgbClr val="FEF3C7"/>
             </a:solidFill>
           </a:ln>
           <a:effectLst/>
@@ -6940,7 +6940,7 @@
             <a:avLst/>
           </a:prstGeom>
           <a:solidFill>
-            <a:srgbClr val="283C5D"/>
+            <a:srgbClr val="B45309"/>
           </a:solidFill>
           <a:ln>
             <a:noFill/>
@@ -7070,7 +7070,7 @@
             </a:avLst>
           </a:prstGeom>
           <a:solidFill>
-            <a:srgbClr val="283C5D"/>
+            <a:srgbClr val="B45309"/>
           </a:solidFill>
           <a:ln>
             <a:noFill/>
@@ -7220,7 +7220,7 @@
             <a:avLst/>
           </a:prstGeom>
           <a:solidFill>
-            <a:srgbClr val="84A0C6"/>
+            <a:srgbClr val="FCD34D"/>
           </a:solidFill>
           <a:ln>
             <a:noFill/>
@@ -7313,7 +7313,7 @@
             </a:avLst>
           </a:prstGeom>
           <a:solidFill>
-            <a:srgbClr val="283C5D"/>
+            <a:srgbClr val="B45309"/>
           </a:solidFill>
           <a:ln>
             <a:noFill/>
@@ -7463,7 +7463,7 @@
             <a:avLst/>
           </a:prstGeom>
           <a:solidFill>
-            <a:srgbClr val="84A0C6"/>
+            <a:srgbClr val="FCD34D"/>
           </a:solidFill>
           <a:ln>
             <a:noFill/>
@@ -7556,7 +7556,7 @@
             </a:avLst>
           </a:prstGeom>
           <a:solidFill>
-            <a:srgbClr val="283C5D"/>
+            <a:srgbClr val="B45309"/>
           </a:solidFill>
           <a:ln>
             <a:noFill/>
@@ -7706,7 +7706,7 @@
             <a:avLst/>
           </a:prstGeom>
           <a:solidFill>
-            <a:srgbClr val="84A0C6"/>
+            <a:srgbClr val="FCD34D"/>
           </a:solidFill>
           <a:ln>
             <a:noFill/>
@@ -7799,7 +7799,7 @@
             </a:avLst>
           </a:prstGeom>
           <a:solidFill>
-            <a:srgbClr val="283C5D"/>
+            <a:srgbClr val="B45309"/>
           </a:solidFill>
           <a:ln>
             <a:noFill/>
@@ -7949,7 +7949,7 @@
             <a:avLst/>
           </a:prstGeom>
           <a:solidFill>
-            <a:srgbClr val="84A0C6"/>
+            <a:srgbClr val="FCD34D"/>
           </a:solidFill>
           <a:ln>
             <a:noFill/>
@@ -8042,7 +8042,7 @@
             </a:avLst>
           </a:prstGeom>
           <a:solidFill>
-            <a:srgbClr val="283C5D"/>
+            <a:srgbClr val="B45309"/>
           </a:solidFill>
           <a:ln>
             <a:noFill/>
@@ -8328,7 +8328,7 @@
             <a:avLst/>
           </a:prstGeom>
           <a:solidFill>
-            <a:srgbClr val="283C5D"/>
+            <a:srgbClr val="B45309"/>
           </a:solidFill>
           <a:ln>
             <a:noFill/>
@@ -8383,7 +8383,7 @@
             <a:r>
               <a:rPr sz="1000" b="1">
                 <a:solidFill>
-                  <a:srgbClr val="283C5D"/>
+                  <a:srgbClr val="B45309"/>
                 </a:solidFill>
                 <a:latin typeface="Calibri"/>
               </a:rPr>
@@ -8562,7 +8562,7 @@
             </a:avLst>
           </a:prstGeom>
           <a:solidFill>
-            <a:srgbClr val="283C5D"/>
+            <a:srgbClr val="B45309"/>
           </a:solidFill>
           <a:ln>
             <a:noFill/>
@@ -8687,7 +8687,7 @@
             <a:r>
               <a:rPr sz="1000" b="1">
                 <a:solidFill>
-                  <a:srgbClr val="3F5E8D"/>
+                  <a:srgbClr val="F59E0B"/>
                 </a:solidFill>
                 <a:latin typeface="Calibri"/>
               </a:rPr>
@@ -8748,7 +8748,7 @@
             <a:avLst/>
           </a:prstGeom>
           <a:solidFill>
-            <a:srgbClr val="84A0C6"/>
+            <a:srgbClr val="FCD34D"/>
           </a:solidFill>
           <a:ln>
             <a:noFill/>
@@ -8841,7 +8841,7 @@
             </a:avLst>
           </a:prstGeom>
           <a:solidFill>
-            <a:srgbClr val="283C5D"/>
+            <a:srgbClr val="B45309"/>
           </a:solidFill>
           <a:ln>
             <a:noFill/>
@@ -8966,7 +8966,7 @@
             <a:r>
               <a:rPr sz="1000" b="1">
                 <a:solidFill>
-                  <a:srgbClr val="3F5E8D"/>
+                  <a:srgbClr val="F59E0B"/>
                 </a:solidFill>
                 <a:latin typeface="Calibri"/>
               </a:rPr>
@@ -9028,7 +9028,7 @@
             <a:avLst/>
           </a:prstGeom>
           <a:solidFill>
-            <a:srgbClr val="84A0C6"/>
+            <a:srgbClr val="FCD34D"/>
           </a:solidFill>
           <a:ln>
             <a:noFill/>
@@ -9121,7 +9121,7 @@
             </a:avLst>
           </a:prstGeom>
           <a:solidFill>
-            <a:srgbClr val="283C5D"/>
+            <a:srgbClr val="B45309"/>
           </a:solidFill>
           <a:ln>
             <a:noFill/>
@@ -9246,7 +9246,7 @@
             <a:r>
               <a:rPr sz="1000" b="1">
                 <a:solidFill>
-                  <a:srgbClr val="3F5E8D"/>
+                  <a:srgbClr val="F59E0B"/>
                 </a:solidFill>
                 <a:latin typeface="Calibri"/>
               </a:rPr>
@@ -9307,7 +9307,7 @@
             <a:avLst/>
           </a:prstGeom>
           <a:solidFill>
-            <a:srgbClr val="84A0C6"/>
+            <a:srgbClr val="FCD34D"/>
           </a:solidFill>
           <a:ln>
             <a:noFill/>
@@ -9400,7 +9400,7 @@
             </a:avLst>
           </a:prstGeom>
           <a:solidFill>
-            <a:srgbClr val="283C5D"/>
+            <a:srgbClr val="B45309"/>
           </a:solidFill>
           <a:ln>
             <a:noFill/>
@@ -9525,7 +9525,7 @@
             <a:r>
               <a:rPr sz="1000" b="1">
                 <a:solidFill>
-                  <a:srgbClr val="3F5E8D"/>
+                  <a:srgbClr val="F59E0B"/>
                 </a:solidFill>
                 <a:latin typeface="Calibri"/>
               </a:rPr>
@@ -9588,11 +9588,11 @@
             </a:avLst>
           </a:prstGeom>
           <a:solidFill>
-            <a:srgbClr val="EEF2F8"/>
+            <a:srgbClr val="FFFBEB"/>
           </a:solidFill>
           <a:ln w="9525">
             <a:solidFill>
-              <a:srgbClr val="D6E0EE"/>
+              <a:srgbClr val="FEF3C7"/>
             </a:solidFill>
           </a:ln>
           <a:effectLst/>
@@ -9645,7 +9645,7 @@
             <a:r>
               <a:rPr sz="1000" b="1">
                 <a:solidFill>
-                  <a:srgbClr val="283C5D"/>
+                  <a:srgbClr val="B45309"/>
                 </a:solidFill>
                 <a:latin typeface="Calibri"/>
               </a:rPr>
@@ -9840,7 +9840,7 @@
             <a:avLst/>
           </a:prstGeom>
           <a:solidFill>
-            <a:srgbClr val="283C5D"/>
+            <a:srgbClr val="B45309"/>
           </a:solidFill>
           <a:ln>
             <a:noFill/>
@@ -9895,7 +9895,7 @@
             <a:r>
               <a:rPr sz="1000" b="1">
                 <a:solidFill>
-                  <a:srgbClr val="283C5D"/>
+                  <a:srgbClr val="B45309"/>
                 </a:solidFill>
                 <a:latin typeface="Calibri"/>
               </a:rPr>
@@ -11518,7 +11518,7 @@
             <a:r>
               <a:rPr sz="1100" b="1">
                 <a:solidFill>
-                  <a:srgbClr val="283C5D"/>
+                  <a:srgbClr val="B45309"/>
                 </a:solidFill>
                 <a:latin typeface="Calibri"/>
               </a:rPr>
@@ -12464,7 +12464,7 @@
             <a:avLst/>
           </a:prstGeom>
           <a:solidFill>
-            <a:srgbClr val="283C5D"/>
+            <a:srgbClr val="B45309"/>
           </a:solidFill>
           <a:ln>
             <a:noFill/>
@@ -12519,7 +12519,7 @@
             <a:r>
               <a:rPr sz="1000" b="1">
                 <a:solidFill>
-                  <a:srgbClr val="283C5D"/>
+                  <a:srgbClr val="B45309"/>
                 </a:solidFill>
                 <a:latin typeface="Calibri"/>
               </a:rPr>
@@ -15807,7 +15807,7 @@
             <a:avLst/>
           </a:prstGeom>
           <a:solidFill>
-            <a:srgbClr val="283C5D"/>
+            <a:srgbClr val="B45309"/>
           </a:solidFill>
           <a:ln>
             <a:noFill/>
@@ -15862,7 +15862,7 @@
             <a:r>
               <a:rPr sz="1000" b="1">
                 <a:solidFill>
-                  <a:srgbClr val="283C5D"/>
+                  <a:srgbClr val="B45309"/>
                 </a:solidFill>
                 <a:latin typeface="Calibri"/>
               </a:rPr>
@@ -16039,7 +16039,7 @@
             <a:avLst/>
           </a:prstGeom>
           <a:solidFill>
-            <a:srgbClr val="283C5D"/>
+            <a:srgbClr val="B45309"/>
           </a:solidFill>
           <a:ln>
             <a:noFill/>
@@ -16165,7 +16165,7 @@
             <a:r>
               <a:rPr sz="900" b="1">
                 <a:solidFill>
-                  <a:srgbClr val="283C5D"/>
+                  <a:srgbClr val="B45309"/>
                 </a:solidFill>
                 <a:latin typeface="Calibri"/>
               </a:rPr>
@@ -16471,7 +16471,7 @@
             <a:avLst/>
           </a:prstGeom>
           <a:solidFill>
-            <a:srgbClr val="283C5D"/>
+            <a:srgbClr val="B45309"/>
           </a:solidFill>
           <a:ln>
             <a:noFill/>
@@ -16597,7 +16597,7 @@
             <a:r>
               <a:rPr sz="900" b="1">
                 <a:solidFill>
-                  <a:srgbClr val="283C5D"/>
+                  <a:srgbClr val="B45309"/>
                 </a:solidFill>
                 <a:latin typeface="Calibri"/>
               </a:rPr>
@@ -16903,7 +16903,7 @@
             <a:avLst/>
           </a:prstGeom>
           <a:solidFill>
-            <a:srgbClr val="283C5D"/>
+            <a:srgbClr val="B45309"/>
           </a:solidFill>
           <a:ln>
             <a:noFill/>
@@ -17029,7 +17029,7 @@
             <a:r>
               <a:rPr sz="900" b="1">
                 <a:solidFill>
-                  <a:srgbClr val="283C5D"/>
+                  <a:srgbClr val="B45309"/>
                 </a:solidFill>
                 <a:latin typeface="Calibri"/>
               </a:rPr>
@@ -17340,7 +17340,7 @@
             <a:avLst/>
           </a:prstGeom>
           <a:solidFill>
-            <a:srgbClr val="283C5D"/>
+            <a:srgbClr val="B45309"/>
           </a:solidFill>
           <a:ln>
             <a:noFill/>
@@ -17395,7 +17395,7 @@
             <a:r>
               <a:rPr sz="1000" b="1">
                 <a:solidFill>
-                  <a:srgbClr val="283C5D"/>
+                  <a:srgbClr val="B45309"/>
                 </a:solidFill>
                 <a:latin typeface="Calibri"/>
               </a:rPr>
@@ -17644,7 +17644,7 @@
             </a:avLst>
           </a:prstGeom>
           <a:solidFill>
-            <a:srgbClr val="EEF2F8"/>
+            <a:srgbClr val="FFFBEB"/>
           </a:solidFill>
           <a:ln>
             <a:noFill/>
@@ -17699,7 +17699,7 @@
             <a:r>
               <a:rPr sz="900" b="1">
                 <a:solidFill>
-                  <a:srgbClr val="283C5D"/>
+                  <a:srgbClr val="B45309"/>
                 </a:solidFill>
                 <a:latin typeface="Calibri"/>
               </a:rPr>
@@ -17734,7 +17734,7 @@
             <a:r>
               <a:rPr sz="1400" b="1">
                 <a:solidFill>
-                  <a:srgbClr val="21304A"/>
+                  <a:srgbClr val="92400E"/>
                 </a:solidFill>
                 <a:latin typeface="Calibri"/>
               </a:rPr>
@@ -18220,824 +18220,6 @@
         <p:spPr>
           <a:xfrm>
             <a:off x="4343400" y="1828800"/>
-            <a:ext cx="3657600" cy="4572000"/>
-          </a:xfrm>
-          <a:prstGeom prst="roundRect">
-            <a:avLst>
-              <a:gd name="adj" fmla="val 4000"/>
-            </a:avLst>
-          </a:prstGeom>
-          <a:solidFill>
-            <a:srgbClr val="FFFFFF"/>
-          </a:solidFill>
-          <a:ln w="25400">
-            <a:solidFill>
-              <a:srgbClr val="283C5D"/>
-            </a:solidFill>
-          </a:ln>
-          <a:effectLst/>
-        </p:spPr>
-        <p:style>
-          <a:lnRef idx="1">
-            <a:schemeClr val="accent1"/>
-          </a:lnRef>
-          <a:fillRef idx="3">
-            <a:schemeClr val="accent1"/>
-          </a:fillRef>
-          <a:effectRef idx="2">
-            <a:schemeClr val="accent1"/>
-          </a:effectRef>
-          <a:fontRef idx="minor">
-            <a:schemeClr val="lt1"/>
-          </a:fontRef>
-        </p:style>
-        <p:txBody>
-          <a:bodyPr rtlCol="0" anchor="ctr"/>
-          <a:lstStyle/>
-          <a:p>
-            <a:pPr algn="ctr"/>
-          </a:p>
-        </p:txBody>
-      </p:sp>
-      <p:sp>
-        <p:nvSpPr>
-          <p:cNvPr id="26" name="Rounded Rectangle 25"/>
-          <p:cNvSpPr/>
-          <p:nvPr/>
-        </p:nvSpPr>
-        <p:spPr>
-          <a:xfrm>
-            <a:off x="4892040" y="1691640"/>
-            <a:ext cx="1828800" cy="274320"/>
-          </a:xfrm>
-          <a:prstGeom prst="roundRect">
-            <a:avLst>
-              <a:gd name="adj" fmla="val 50000"/>
-            </a:avLst>
-          </a:prstGeom>
-          <a:solidFill>
-            <a:srgbClr val="283C5D"/>
-          </a:solidFill>
-          <a:ln>
-            <a:noFill/>
-          </a:ln>
-          <a:effectLst/>
-        </p:spPr>
-        <p:style>
-          <a:lnRef idx="1">
-            <a:schemeClr val="accent1"/>
-          </a:lnRef>
-          <a:fillRef idx="3">
-            <a:schemeClr val="accent1"/>
-          </a:fillRef>
-          <a:effectRef idx="2">
-            <a:schemeClr val="accent1"/>
-          </a:effectRef>
-          <a:fontRef idx="minor">
-            <a:schemeClr val="lt1"/>
-          </a:fontRef>
-        </p:style>
-        <p:txBody>
-          <a:bodyPr rtlCol="0" anchor="ctr"/>
-          <a:lstStyle/>
-          <a:p>
-            <a:pPr algn="ctr"/>
-          </a:p>
-        </p:txBody>
-      </p:sp>
-      <p:sp>
-        <p:nvSpPr>
-          <p:cNvPr id="27" name="TextBox 26"/>
-          <p:cNvSpPr txBox="1"/>
-          <p:nvPr/>
-        </p:nvSpPr>
-        <p:spPr>
-          <a:xfrm>
-            <a:off x="4892040" y="1709928"/>
-            <a:ext cx="1828800" cy="256032"/>
-          </a:xfrm>
-          <a:prstGeom prst="rect">
-            <a:avLst/>
-          </a:prstGeom>
-          <a:noFill/>
-        </p:spPr>
-        <p:txBody>
-          <a:bodyPr wrap="square" anchor="ctr" lIns="0" rIns="0" tIns="0" bIns="0">
-            <a:spAutoFit/>
-          </a:bodyPr>
-          <a:lstStyle/>
-          <a:p>
-            <a:pPr algn="ctr"/>
-            <a:r>
-              <a:rPr sz="800" b="1">
-                <a:solidFill>
-                  <a:srgbClr val="FFFFFF"/>
-                </a:solidFill>
-                <a:latin typeface="Calibri"/>
-              </a:rPr>
-              <a:t>MOST POPULAR</a:t>
-            </a:r>
-          </a:p>
-        </p:txBody>
-      </p:sp>
-      <p:sp>
-        <p:nvSpPr>
-          <p:cNvPr id="28" name="TextBox 27"/>
-          <p:cNvSpPr txBox="1"/>
-          <p:nvPr/>
-        </p:nvSpPr>
-        <p:spPr>
-          <a:xfrm>
-            <a:off x="4617720" y="2103120"/>
-            <a:ext cx="3108960" cy="365760"/>
-          </a:xfrm>
-          <a:prstGeom prst="rect">
-            <a:avLst/>
-          </a:prstGeom>
-          <a:noFill/>
-        </p:spPr>
-        <p:txBody>
-          <a:bodyPr wrap="square" anchor="t" lIns="0" rIns="0" tIns="0" bIns="0">
-            <a:spAutoFit/>
-          </a:bodyPr>
-          <a:lstStyle/>
-          <a:p>
-            <a:pPr algn="l"/>
-            <a:r>
-              <a:rPr sz="1600" b="1">
-                <a:solidFill>
-                  <a:srgbClr val="18181B"/>
-                </a:solidFill>
-                <a:latin typeface="Calibri"/>
-              </a:rPr>
-              <a:t>Starter</a:t>
-            </a:r>
-          </a:p>
-        </p:txBody>
-      </p:sp>
-      <p:sp>
-        <p:nvSpPr>
-          <p:cNvPr id="29" name="TextBox 28"/>
-          <p:cNvSpPr txBox="1"/>
-          <p:nvPr/>
-        </p:nvSpPr>
-        <p:spPr>
-          <a:xfrm>
-            <a:off x="4617720" y="2514600"/>
-            <a:ext cx="3108960" cy="548640"/>
-          </a:xfrm>
-          <a:prstGeom prst="rect">
-            <a:avLst/>
-          </a:prstGeom>
-          <a:noFill/>
-        </p:spPr>
-        <p:txBody>
-          <a:bodyPr wrap="square" anchor="t" lIns="0" rIns="0" tIns="0" bIns="0">
-            <a:spAutoFit/>
-          </a:bodyPr>
-          <a:lstStyle/>
-          <a:p>
-            <a:pPr algn="l"/>
-            <a:r>
-              <a:rPr sz="3400" b="1">
-                <a:solidFill>
-                  <a:srgbClr val="18181B"/>
-                </a:solidFill>
-                <a:latin typeface="Calibri"/>
-              </a:rPr>
-              <a:t>$99</a:t>
-            </a:r>
-          </a:p>
-        </p:txBody>
-      </p:sp>
-      <p:sp>
-        <p:nvSpPr>
-          <p:cNvPr id="30" name="TextBox 29"/>
-          <p:cNvSpPr txBox="1"/>
-          <p:nvPr/>
-        </p:nvSpPr>
-        <p:spPr>
-          <a:xfrm>
-            <a:off x="5897880" y="2743200"/>
-            <a:ext cx="1371600" cy="365760"/>
-          </a:xfrm>
-          <a:prstGeom prst="rect">
-            <a:avLst/>
-          </a:prstGeom>
-          <a:noFill/>
-        </p:spPr>
-        <p:txBody>
-          <a:bodyPr wrap="square" anchor="t" lIns="0" rIns="0" tIns="0" bIns="0">
-            <a:spAutoFit/>
-          </a:bodyPr>
-          <a:lstStyle/>
-          <a:p>
-            <a:pPr algn="l"/>
-            <a:r>
-              <a:rPr sz="1100" b="0">
-                <a:solidFill>
-                  <a:srgbClr val="71717A"/>
-                </a:solidFill>
-                <a:latin typeface="Calibri"/>
-              </a:rPr>
-              <a:t>/mo</a:t>
-            </a:r>
-          </a:p>
-        </p:txBody>
-      </p:sp>
-      <p:sp>
-        <p:nvSpPr>
-          <p:cNvPr id="31" name="Rounded Rectangle 30"/>
-          <p:cNvSpPr/>
-          <p:nvPr/>
-        </p:nvSpPr>
-        <p:spPr>
-          <a:xfrm>
-            <a:off x="4617720" y="3291840"/>
-            <a:ext cx="3108960" cy="594360"/>
-          </a:xfrm>
-          <a:prstGeom prst="roundRect">
-            <a:avLst>
-              <a:gd name="adj" fmla="val 8000"/>
-            </a:avLst>
-          </a:prstGeom>
-          <a:solidFill>
-            <a:srgbClr val="EEF2F8"/>
-          </a:solidFill>
-          <a:ln>
-            <a:noFill/>
-          </a:ln>
-          <a:effectLst/>
-        </p:spPr>
-        <p:style>
-          <a:lnRef idx="1">
-            <a:schemeClr val="accent1"/>
-          </a:lnRef>
-          <a:fillRef idx="3">
-            <a:schemeClr val="accent1"/>
-          </a:fillRef>
-          <a:effectRef idx="2">
-            <a:schemeClr val="accent1"/>
-          </a:effectRef>
-          <a:fontRef idx="minor">
-            <a:schemeClr val="lt1"/>
-          </a:fontRef>
-        </p:style>
-        <p:txBody>
-          <a:bodyPr rtlCol="0" anchor="ctr"/>
-          <a:lstStyle/>
-          <a:p>
-            <a:pPr algn="ctr"/>
-          </a:p>
-        </p:txBody>
-      </p:sp>
-      <p:sp>
-        <p:nvSpPr>
-          <p:cNvPr id="32" name="TextBox 31"/>
-          <p:cNvSpPr txBox="1"/>
-          <p:nvPr/>
-        </p:nvSpPr>
-        <p:spPr>
-          <a:xfrm>
-            <a:off x="4617720" y="3337560"/>
-            <a:ext cx="3108960" cy="228600"/>
-          </a:xfrm>
-          <a:prstGeom prst="rect">
-            <a:avLst/>
-          </a:prstGeom>
-          <a:noFill/>
-        </p:spPr>
-        <p:txBody>
-          <a:bodyPr wrap="square" anchor="t" lIns="0" rIns="0" tIns="0" bIns="0">
-            <a:spAutoFit/>
-          </a:bodyPr>
-          <a:lstStyle/>
-          <a:p>
-            <a:pPr algn="ctr"/>
-            <a:r>
-              <a:rPr sz="900" b="1">
-                <a:solidFill>
-                  <a:srgbClr val="283C5D"/>
-                </a:solidFill>
-                <a:latin typeface="Calibri"/>
-              </a:rPr>
-              <a:t>DRILL FREQUENCY</a:t>
-            </a:r>
-          </a:p>
-        </p:txBody>
-      </p:sp>
-      <p:sp>
-        <p:nvSpPr>
-          <p:cNvPr id="33" name="TextBox 32"/>
-          <p:cNvSpPr txBox="1"/>
-          <p:nvPr/>
-        </p:nvSpPr>
-        <p:spPr>
-          <a:xfrm>
-            <a:off x="4617720" y="3547872"/>
-            <a:ext cx="3108960" cy="274320"/>
-          </a:xfrm>
-          <a:prstGeom prst="rect">
-            <a:avLst/>
-          </a:prstGeom>
-          <a:noFill/>
-        </p:spPr>
-        <p:txBody>
-          <a:bodyPr wrap="square" anchor="t" lIns="0" rIns="0" tIns="0" bIns="0">
-            <a:spAutoFit/>
-          </a:bodyPr>
-          <a:lstStyle/>
-          <a:p>
-            <a:pPr algn="ctr"/>
-            <a:r>
-              <a:rPr sz="1400" b="1">
-                <a:solidFill>
-                  <a:srgbClr val="21304A"/>
-                </a:solidFill>
-                <a:latin typeface="Calibri"/>
-              </a:rPr>
-              <a:t>Daily</a:t>
-            </a:r>
-          </a:p>
-        </p:txBody>
-      </p:sp>
-      <p:sp>
-        <p:nvSpPr>
-          <p:cNvPr id="34" name="Oval 33"/>
-          <p:cNvSpPr/>
-          <p:nvPr/>
-        </p:nvSpPr>
-        <p:spPr>
-          <a:xfrm>
-            <a:off x="4617720" y="4142232"/>
-            <a:ext cx="91440" cy="91440"/>
-          </a:xfrm>
-          <a:prstGeom prst="ellipse">
-            <a:avLst/>
-          </a:prstGeom>
-          <a:solidFill>
-            <a:srgbClr val="10B981"/>
-          </a:solidFill>
-          <a:ln>
-            <a:noFill/>
-          </a:ln>
-        </p:spPr>
-        <p:style>
-          <a:lnRef idx="1">
-            <a:schemeClr val="accent1"/>
-          </a:lnRef>
-          <a:fillRef idx="3">
-            <a:schemeClr val="accent1"/>
-          </a:fillRef>
-          <a:effectRef idx="2">
-            <a:schemeClr val="accent1"/>
-          </a:effectRef>
-          <a:fontRef idx="minor">
-            <a:schemeClr val="lt1"/>
-          </a:fontRef>
-        </p:style>
-        <p:txBody>
-          <a:bodyPr rtlCol="0" anchor="ctr"/>
-          <a:lstStyle/>
-          <a:p>
-            <a:pPr algn="ctr"/>
-          </a:p>
-        </p:txBody>
-      </p:sp>
-      <p:sp>
-        <p:nvSpPr>
-          <p:cNvPr id="35" name="TextBox 34"/>
-          <p:cNvSpPr txBox="1"/>
-          <p:nvPr/>
-        </p:nvSpPr>
-        <p:spPr>
-          <a:xfrm>
-            <a:off x="4800600" y="4069080"/>
-            <a:ext cx="2926080" cy="274320"/>
-          </a:xfrm>
-          <a:prstGeom prst="rect">
-            <a:avLst/>
-          </a:prstGeom>
-          <a:noFill/>
-        </p:spPr>
-        <p:txBody>
-          <a:bodyPr wrap="square" anchor="t" lIns="0" rIns="0" tIns="0" bIns="0">
-            <a:spAutoFit/>
-          </a:bodyPr>
-          <a:lstStyle/>
-          <a:p>
-            <a:pPr algn="l"/>
-            <a:r>
-              <a:rPr sz="1000" b="0">
-                <a:solidFill>
-                  <a:srgbClr val="3F3F46"/>
-                </a:solidFill>
-                <a:latin typeface="Calibri"/>
-              </a:rPr>
-              <a:t>10 databases</a:t>
-            </a:r>
-          </a:p>
-        </p:txBody>
-      </p:sp>
-      <p:sp>
-        <p:nvSpPr>
-          <p:cNvPr id="36" name="Oval 35"/>
-          <p:cNvSpPr/>
-          <p:nvPr/>
-        </p:nvSpPr>
-        <p:spPr>
-          <a:xfrm>
-            <a:off x="4617720" y="4462272"/>
-            <a:ext cx="91440" cy="91440"/>
-          </a:xfrm>
-          <a:prstGeom prst="ellipse">
-            <a:avLst/>
-          </a:prstGeom>
-          <a:solidFill>
-            <a:srgbClr val="10B981"/>
-          </a:solidFill>
-          <a:ln>
-            <a:noFill/>
-          </a:ln>
-        </p:spPr>
-        <p:style>
-          <a:lnRef idx="1">
-            <a:schemeClr val="accent1"/>
-          </a:lnRef>
-          <a:fillRef idx="3">
-            <a:schemeClr val="accent1"/>
-          </a:fillRef>
-          <a:effectRef idx="2">
-            <a:schemeClr val="accent1"/>
-          </a:effectRef>
-          <a:fontRef idx="minor">
-            <a:schemeClr val="lt1"/>
-          </a:fontRef>
-        </p:style>
-        <p:txBody>
-          <a:bodyPr rtlCol="0" anchor="ctr"/>
-          <a:lstStyle/>
-          <a:p>
-            <a:pPr algn="ctr"/>
-          </a:p>
-        </p:txBody>
-      </p:sp>
-      <p:sp>
-        <p:nvSpPr>
-          <p:cNvPr id="37" name="TextBox 36"/>
-          <p:cNvSpPr txBox="1"/>
-          <p:nvPr/>
-        </p:nvSpPr>
-        <p:spPr>
-          <a:xfrm>
-            <a:off x="4800600" y="4389120"/>
-            <a:ext cx="2926080" cy="274320"/>
-          </a:xfrm>
-          <a:prstGeom prst="rect">
-            <a:avLst/>
-          </a:prstGeom>
-          <a:noFill/>
-        </p:spPr>
-        <p:txBody>
-          <a:bodyPr wrap="square" anchor="t" lIns="0" rIns="0" tIns="0" bIns="0">
-            <a:spAutoFit/>
-          </a:bodyPr>
-          <a:lstStyle/>
-          <a:p>
-            <a:pPr algn="l"/>
-            <a:r>
-              <a:rPr sz="1000" b="0">
-                <a:solidFill>
-                  <a:srgbClr val="3F3F46"/>
-                </a:solidFill>
-                <a:latin typeface="Calibri"/>
-              </a:rPr>
-              <a:t>10 team seats</a:t>
-            </a:r>
-          </a:p>
-        </p:txBody>
-      </p:sp>
-      <p:sp>
-        <p:nvSpPr>
-          <p:cNvPr id="38" name="Oval 37"/>
-          <p:cNvSpPr/>
-          <p:nvPr/>
-        </p:nvSpPr>
-        <p:spPr>
-          <a:xfrm>
-            <a:off x="4617720" y="4782312"/>
-            <a:ext cx="91440" cy="91440"/>
-          </a:xfrm>
-          <a:prstGeom prst="ellipse">
-            <a:avLst/>
-          </a:prstGeom>
-          <a:solidFill>
-            <a:srgbClr val="10B981"/>
-          </a:solidFill>
-          <a:ln>
-            <a:noFill/>
-          </a:ln>
-        </p:spPr>
-        <p:style>
-          <a:lnRef idx="1">
-            <a:schemeClr val="accent1"/>
-          </a:lnRef>
-          <a:fillRef idx="3">
-            <a:schemeClr val="accent1"/>
-          </a:fillRef>
-          <a:effectRef idx="2">
-            <a:schemeClr val="accent1"/>
-          </a:effectRef>
-          <a:fontRef idx="minor">
-            <a:schemeClr val="lt1"/>
-          </a:fontRef>
-        </p:style>
-        <p:txBody>
-          <a:bodyPr rtlCol="0" anchor="ctr"/>
-          <a:lstStyle/>
-          <a:p>
-            <a:pPr algn="ctr"/>
-          </a:p>
-        </p:txBody>
-      </p:sp>
-      <p:sp>
-        <p:nvSpPr>
-          <p:cNvPr id="39" name="TextBox 38"/>
-          <p:cNvSpPr txBox="1"/>
-          <p:nvPr/>
-        </p:nvSpPr>
-        <p:spPr>
-          <a:xfrm>
-            <a:off x="4800600" y="4709160"/>
-            <a:ext cx="2926080" cy="274320"/>
-          </a:xfrm>
-          <a:prstGeom prst="rect">
-            <a:avLst/>
-          </a:prstGeom>
-          <a:noFill/>
-        </p:spPr>
-        <p:txBody>
-          <a:bodyPr wrap="square" anchor="t" lIns="0" rIns="0" tIns="0" bIns="0">
-            <a:spAutoFit/>
-          </a:bodyPr>
-          <a:lstStyle/>
-          <a:p>
-            <a:pPr algn="l"/>
-            <a:r>
-              <a:rPr sz="1000" b="0">
-                <a:solidFill>
-                  <a:srgbClr val="3F3F46"/>
-                </a:solidFill>
-                <a:latin typeface="Calibri"/>
-              </a:rPr>
-              <a:t>Signed PDF evidence</a:t>
-            </a:r>
-          </a:p>
-        </p:txBody>
-      </p:sp>
-      <p:sp>
-        <p:nvSpPr>
-          <p:cNvPr id="40" name="Oval 39"/>
-          <p:cNvSpPr/>
-          <p:nvPr/>
-        </p:nvSpPr>
-        <p:spPr>
-          <a:xfrm>
-            <a:off x="4617720" y="5102352"/>
-            <a:ext cx="91440" cy="91440"/>
-          </a:xfrm>
-          <a:prstGeom prst="ellipse">
-            <a:avLst/>
-          </a:prstGeom>
-          <a:solidFill>
-            <a:srgbClr val="10B981"/>
-          </a:solidFill>
-          <a:ln>
-            <a:noFill/>
-          </a:ln>
-        </p:spPr>
-        <p:style>
-          <a:lnRef idx="1">
-            <a:schemeClr val="accent1"/>
-          </a:lnRef>
-          <a:fillRef idx="3">
-            <a:schemeClr val="accent1"/>
-          </a:fillRef>
-          <a:effectRef idx="2">
-            <a:schemeClr val="accent1"/>
-          </a:effectRef>
-          <a:fontRef idx="minor">
-            <a:schemeClr val="lt1"/>
-          </a:fontRef>
-        </p:style>
-        <p:txBody>
-          <a:bodyPr rtlCol="0" anchor="ctr"/>
-          <a:lstStyle/>
-          <a:p>
-            <a:pPr algn="ctr"/>
-          </a:p>
-        </p:txBody>
-      </p:sp>
-      <p:sp>
-        <p:nvSpPr>
-          <p:cNvPr id="41" name="TextBox 40"/>
-          <p:cNvSpPr txBox="1"/>
-          <p:nvPr/>
-        </p:nvSpPr>
-        <p:spPr>
-          <a:xfrm>
-            <a:off x="4800600" y="5029200"/>
-            <a:ext cx="2926080" cy="274320"/>
-          </a:xfrm>
-          <a:prstGeom prst="rect">
-            <a:avLst/>
-          </a:prstGeom>
-          <a:noFill/>
-        </p:spPr>
-        <p:txBody>
-          <a:bodyPr wrap="square" anchor="t" lIns="0" rIns="0" tIns="0" bIns="0">
-            <a:spAutoFit/>
-          </a:bodyPr>
-          <a:lstStyle/>
-          <a:p>
-            <a:pPr algn="l"/>
-            <a:r>
-              <a:rPr sz="1000" b="0">
-                <a:solidFill>
-                  <a:srgbClr val="3F3F46"/>
-                </a:solidFill>
-                <a:latin typeface="Calibri"/>
-              </a:rPr>
-              <a:t>7-year retention</a:t>
-            </a:r>
-          </a:p>
-        </p:txBody>
-      </p:sp>
-      <p:sp>
-        <p:nvSpPr>
-          <p:cNvPr id="42" name="Oval 41"/>
-          <p:cNvSpPr/>
-          <p:nvPr/>
-        </p:nvSpPr>
-        <p:spPr>
-          <a:xfrm>
-            <a:off x="4617720" y="5422392"/>
-            <a:ext cx="91440" cy="91440"/>
-          </a:xfrm>
-          <a:prstGeom prst="ellipse">
-            <a:avLst/>
-          </a:prstGeom>
-          <a:solidFill>
-            <a:srgbClr val="10B981"/>
-          </a:solidFill>
-          <a:ln>
-            <a:noFill/>
-          </a:ln>
-        </p:spPr>
-        <p:style>
-          <a:lnRef idx="1">
-            <a:schemeClr val="accent1"/>
-          </a:lnRef>
-          <a:fillRef idx="3">
-            <a:schemeClr val="accent1"/>
-          </a:fillRef>
-          <a:effectRef idx="2">
-            <a:schemeClr val="accent1"/>
-          </a:effectRef>
-          <a:fontRef idx="minor">
-            <a:schemeClr val="lt1"/>
-          </a:fontRef>
-        </p:style>
-        <p:txBody>
-          <a:bodyPr rtlCol="0" anchor="ctr"/>
-          <a:lstStyle/>
-          <a:p>
-            <a:pPr algn="ctr"/>
-          </a:p>
-        </p:txBody>
-      </p:sp>
-      <p:sp>
-        <p:nvSpPr>
-          <p:cNvPr id="43" name="TextBox 42"/>
-          <p:cNvSpPr txBox="1"/>
-          <p:nvPr/>
-        </p:nvSpPr>
-        <p:spPr>
-          <a:xfrm>
-            <a:off x="4800600" y="5349240"/>
-            <a:ext cx="2926080" cy="274320"/>
-          </a:xfrm>
-          <a:prstGeom prst="rect">
-            <a:avLst/>
-          </a:prstGeom>
-          <a:noFill/>
-        </p:spPr>
-        <p:txBody>
-          <a:bodyPr wrap="square" anchor="t" lIns="0" rIns="0" tIns="0" bIns="0">
-            <a:spAutoFit/>
-          </a:bodyPr>
-          <a:lstStyle/>
-          <a:p>
-            <a:pPr algn="l"/>
-            <a:r>
-              <a:rPr sz="1000" b="0">
-                <a:solidFill>
-                  <a:srgbClr val="3F3F46"/>
-                </a:solidFill>
-                <a:latin typeface="Calibri"/>
-              </a:rPr>
-              <a:t>API &amp; webhooks · Slack alerts</a:t>
-            </a:r>
-          </a:p>
-        </p:txBody>
-      </p:sp>
-      <p:sp>
-        <p:nvSpPr>
-          <p:cNvPr id="44" name="Oval 43"/>
-          <p:cNvSpPr/>
-          <p:nvPr/>
-        </p:nvSpPr>
-        <p:spPr>
-          <a:xfrm>
-            <a:off x="4617720" y="5742432"/>
-            <a:ext cx="91440" cy="91440"/>
-          </a:xfrm>
-          <a:prstGeom prst="ellipse">
-            <a:avLst/>
-          </a:prstGeom>
-          <a:solidFill>
-            <a:srgbClr val="10B981"/>
-          </a:solidFill>
-          <a:ln>
-            <a:noFill/>
-          </a:ln>
-        </p:spPr>
-        <p:style>
-          <a:lnRef idx="1">
-            <a:schemeClr val="accent1"/>
-          </a:lnRef>
-          <a:fillRef idx="3">
-            <a:schemeClr val="accent1"/>
-          </a:fillRef>
-          <a:effectRef idx="2">
-            <a:schemeClr val="accent1"/>
-          </a:effectRef>
-          <a:fontRef idx="minor">
-            <a:schemeClr val="lt1"/>
-          </a:fontRef>
-        </p:style>
-        <p:txBody>
-          <a:bodyPr rtlCol="0" anchor="ctr"/>
-          <a:lstStyle/>
-          <a:p>
-            <a:pPr algn="ctr"/>
-          </a:p>
-        </p:txBody>
-      </p:sp>
-      <p:sp>
-        <p:nvSpPr>
-          <p:cNvPr id="45" name="TextBox 44"/>
-          <p:cNvSpPr txBox="1"/>
-          <p:nvPr/>
-        </p:nvSpPr>
-        <p:spPr>
-          <a:xfrm>
-            <a:off x="4800600" y="5669280"/>
-            <a:ext cx="2926080" cy="274320"/>
-          </a:xfrm>
-          <a:prstGeom prst="rect">
-            <a:avLst/>
-          </a:prstGeom>
-          <a:noFill/>
-        </p:spPr>
-        <p:txBody>
-          <a:bodyPr wrap="square" anchor="t" lIns="0" rIns="0" tIns="0" bIns="0">
-            <a:spAutoFit/>
-          </a:bodyPr>
-          <a:lstStyle/>
-          <a:p>
-            <a:pPr algn="l"/>
-            <a:r>
-              <a:rPr sz="1000" b="0">
-                <a:solidFill>
-                  <a:srgbClr val="3F3F46"/>
-                </a:solidFill>
-                <a:latin typeface="Calibri"/>
-              </a:rPr>
-              <a:t>Email support</a:t>
-            </a:r>
-          </a:p>
-        </p:txBody>
-      </p:sp>
-      <p:sp>
-        <p:nvSpPr>
-          <p:cNvPr id="46" name="Rounded Rectangle 45"/>
-          <p:cNvSpPr/>
-          <p:nvPr/>
-        </p:nvSpPr>
-        <p:spPr>
-          <a:xfrm>
-            <a:off x="8138160" y="1828800"/>
             <a:ext cx="3657600" cy="4572000"/>
           </a:xfrm>
           <a:prstGeom prst="roundRect">
@@ -19079,13 +18261,13 @@
       </p:sp>
       <p:sp>
         <p:nvSpPr>
-          <p:cNvPr id="47" name="TextBox 46"/>
-          <p:cNvSpPr txBox="1"/>
-          <p:nvPr/>
-        </p:nvSpPr>
-        <p:spPr>
-          <a:xfrm>
-            <a:off x="8412480" y="2103120"/>
+          <p:cNvPr id="26" name="TextBox 25"/>
+          <p:cNvSpPr txBox="1"/>
+          <p:nvPr/>
+        </p:nvSpPr>
+        <p:spPr>
+          <a:xfrm>
+            <a:off x="4617720" y="2103120"/>
             <a:ext cx="3108960" cy="365760"/>
           </a:xfrm>
           <a:prstGeom prst="rect">
@@ -19107,20 +18289,20 @@
                 </a:solidFill>
                 <a:latin typeface="Calibri"/>
               </a:rPr>
-              <a:t>Pro</a:t>
-            </a:r>
-          </a:p>
-        </p:txBody>
-      </p:sp>
-      <p:sp>
-        <p:nvSpPr>
-          <p:cNvPr id="48" name="TextBox 47"/>
-          <p:cNvSpPr txBox="1"/>
-          <p:nvPr/>
-        </p:nvSpPr>
-        <p:spPr>
-          <a:xfrm>
-            <a:off x="8412480" y="2514600"/>
+              <a:t>Standard</a:t>
+            </a:r>
+          </a:p>
+        </p:txBody>
+      </p:sp>
+      <p:sp>
+        <p:nvSpPr>
+          <p:cNvPr id="27" name="TextBox 26"/>
+          <p:cNvSpPr txBox="1"/>
+          <p:nvPr/>
+        </p:nvSpPr>
+        <p:spPr>
+          <a:xfrm>
+            <a:off x="4617720" y="2514600"/>
             <a:ext cx="3108960" cy="548640"/>
           </a:xfrm>
           <a:prstGeom prst="rect">
@@ -19142,20 +18324,20 @@
                 </a:solidFill>
                 <a:latin typeface="Calibri"/>
               </a:rPr>
-              <a:t>$299</a:t>
-            </a:r>
-          </a:p>
-        </p:txBody>
-      </p:sp>
-      <p:sp>
-        <p:nvSpPr>
-          <p:cNvPr id="49" name="TextBox 48"/>
-          <p:cNvSpPr txBox="1"/>
-          <p:nvPr/>
-        </p:nvSpPr>
-        <p:spPr>
-          <a:xfrm>
-            <a:off x="9692640" y="2743200"/>
+              <a:t>$99</a:t>
+            </a:r>
+          </a:p>
+        </p:txBody>
+      </p:sp>
+      <p:sp>
+        <p:nvSpPr>
+          <p:cNvPr id="28" name="TextBox 27"/>
+          <p:cNvSpPr txBox="1"/>
+          <p:nvPr/>
+        </p:nvSpPr>
+        <p:spPr>
+          <a:xfrm>
+            <a:off x="5897880" y="2743200"/>
             <a:ext cx="1371600" cy="365760"/>
           </a:xfrm>
           <a:prstGeom prst="rect">
@@ -19184,13 +18366,13 @@
       </p:sp>
       <p:sp>
         <p:nvSpPr>
-          <p:cNvPr id="50" name="Rounded Rectangle 49"/>
+          <p:cNvPr id="29" name="Rounded Rectangle 28"/>
           <p:cNvSpPr/>
           <p:nvPr/>
         </p:nvSpPr>
         <p:spPr>
           <a:xfrm>
-            <a:off x="8412480" y="3291840"/>
+            <a:off x="4617720" y="3291840"/>
             <a:ext cx="3108960" cy="594360"/>
           </a:xfrm>
           <a:prstGeom prst="roundRect">
@@ -19199,7 +18381,7 @@
             </a:avLst>
           </a:prstGeom>
           <a:solidFill>
-            <a:srgbClr val="EEF2F8"/>
+            <a:srgbClr val="FFFBEB"/>
           </a:solidFill>
           <a:ln>
             <a:noFill/>
@@ -19230,6 +18412,824 @@
       </p:sp>
       <p:sp>
         <p:nvSpPr>
+          <p:cNvPr id="30" name="TextBox 29"/>
+          <p:cNvSpPr txBox="1"/>
+          <p:nvPr/>
+        </p:nvSpPr>
+        <p:spPr>
+          <a:xfrm>
+            <a:off x="4617720" y="3337560"/>
+            <a:ext cx="3108960" cy="228600"/>
+          </a:xfrm>
+          <a:prstGeom prst="rect">
+            <a:avLst/>
+          </a:prstGeom>
+          <a:noFill/>
+        </p:spPr>
+        <p:txBody>
+          <a:bodyPr wrap="square" anchor="t" lIns="0" rIns="0" tIns="0" bIns="0">
+            <a:spAutoFit/>
+          </a:bodyPr>
+          <a:lstStyle/>
+          <a:p>
+            <a:pPr algn="ctr"/>
+            <a:r>
+              <a:rPr sz="900" b="1">
+                <a:solidFill>
+                  <a:srgbClr val="B45309"/>
+                </a:solidFill>
+                <a:latin typeface="Calibri"/>
+              </a:rPr>
+              <a:t>DRILL FREQUENCY</a:t>
+            </a:r>
+          </a:p>
+        </p:txBody>
+      </p:sp>
+      <p:sp>
+        <p:nvSpPr>
+          <p:cNvPr id="31" name="TextBox 30"/>
+          <p:cNvSpPr txBox="1"/>
+          <p:nvPr/>
+        </p:nvSpPr>
+        <p:spPr>
+          <a:xfrm>
+            <a:off x="4617720" y="3547872"/>
+            <a:ext cx="3108960" cy="274320"/>
+          </a:xfrm>
+          <a:prstGeom prst="rect">
+            <a:avLst/>
+          </a:prstGeom>
+          <a:noFill/>
+        </p:spPr>
+        <p:txBody>
+          <a:bodyPr wrap="square" anchor="t" lIns="0" rIns="0" tIns="0" bIns="0">
+            <a:spAutoFit/>
+          </a:bodyPr>
+          <a:lstStyle/>
+          <a:p>
+            <a:pPr algn="ctr"/>
+            <a:r>
+              <a:rPr sz="1400" b="1">
+                <a:solidFill>
+                  <a:srgbClr val="92400E"/>
+                </a:solidFill>
+                <a:latin typeface="Calibri"/>
+              </a:rPr>
+              <a:t>Weekly</a:t>
+            </a:r>
+          </a:p>
+        </p:txBody>
+      </p:sp>
+      <p:sp>
+        <p:nvSpPr>
+          <p:cNvPr id="32" name="Oval 31"/>
+          <p:cNvSpPr/>
+          <p:nvPr/>
+        </p:nvSpPr>
+        <p:spPr>
+          <a:xfrm>
+            <a:off x="4617720" y="4142232"/>
+            <a:ext cx="91440" cy="91440"/>
+          </a:xfrm>
+          <a:prstGeom prst="ellipse">
+            <a:avLst/>
+          </a:prstGeom>
+          <a:solidFill>
+            <a:srgbClr val="10B981"/>
+          </a:solidFill>
+          <a:ln>
+            <a:noFill/>
+          </a:ln>
+        </p:spPr>
+        <p:style>
+          <a:lnRef idx="1">
+            <a:schemeClr val="accent1"/>
+          </a:lnRef>
+          <a:fillRef idx="3">
+            <a:schemeClr val="accent1"/>
+          </a:fillRef>
+          <a:effectRef idx="2">
+            <a:schemeClr val="accent1"/>
+          </a:effectRef>
+          <a:fontRef idx="minor">
+            <a:schemeClr val="lt1"/>
+          </a:fontRef>
+        </p:style>
+        <p:txBody>
+          <a:bodyPr rtlCol="0" anchor="ctr"/>
+          <a:lstStyle/>
+          <a:p>
+            <a:pPr algn="ctr"/>
+          </a:p>
+        </p:txBody>
+      </p:sp>
+      <p:sp>
+        <p:nvSpPr>
+          <p:cNvPr id="33" name="TextBox 32"/>
+          <p:cNvSpPr txBox="1"/>
+          <p:nvPr/>
+        </p:nvSpPr>
+        <p:spPr>
+          <a:xfrm>
+            <a:off x="4800600" y="4069080"/>
+            <a:ext cx="2926080" cy="274320"/>
+          </a:xfrm>
+          <a:prstGeom prst="rect">
+            <a:avLst/>
+          </a:prstGeom>
+          <a:noFill/>
+        </p:spPr>
+        <p:txBody>
+          <a:bodyPr wrap="square" anchor="t" lIns="0" rIns="0" tIns="0" bIns="0">
+            <a:spAutoFit/>
+          </a:bodyPr>
+          <a:lstStyle/>
+          <a:p>
+            <a:pPr algn="l"/>
+            <a:r>
+              <a:rPr sz="1000" b="0">
+                <a:solidFill>
+                  <a:srgbClr val="3F3F46"/>
+                </a:solidFill>
+                <a:latin typeface="Calibri"/>
+              </a:rPr>
+              <a:t>10 databases</a:t>
+            </a:r>
+          </a:p>
+        </p:txBody>
+      </p:sp>
+      <p:sp>
+        <p:nvSpPr>
+          <p:cNvPr id="34" name="Oval 33"/>
+          <p:cNvSpPr/>
+          <p:nvPr/>
+        </p:nvSpPr>
+        <p:spPr>
+          <a:xfrm>
+            <a:off x="4617720" y="4462272"/>
+            <a:ext cx="91440" cy="91440"/>
+          </a:xfrm>
+          <a:prstGeom prst="ellipse">
+            <a:avLst/>
+          </a:prstGeom>
+          <a:solidFill>
+            <a:srgbClr val="10B981"/>
+          </a:solidFill>
+          <a:ln>
+            <a:noFill/>
+          </a:ln>
+        </p:spPr>
+        <p:style>
+          <a:lnRef idx="1">
+            <a:schemeClr val="accent1"/>
+          </a:lnRef>
+          <a:fillRef idx="3">
+            <a:schemeClr val="accent1"/>
+          </a:fillRef>
+          <a:effectRef idx="2">
+            <a:schemeClr val="accent1"/>
+          </a:effectRef>
+          <a:fontRef idx="minor">
+            <a:schemeClr val="lt1"/>
+          </a:fontRef>
+        </p:style>
+        <p:txBody>
+          <a:bodyPr rtlCol="0" anchor="ctr"/>
+          <a:lstStyle/>
+          <a:p>
+            <a:pPr algn="ctr"/>
+          </a:p>
+        </p:txBody>
+      </p:sp>
+      <p:sp>
+        <p:nvSpPr>
+          <p:cNvPr id="35" name="TextBox 34"/>
+          <p:cNvSpPr txBox="1"/>
+          <p:nvPr/>
+        </p:nvSpPr>
+        <p:spPr>
+          <a:xfrm>
+            <a:off x="4800600" y="4389120"/>
+            <a:ext cx="2926080" cy="274320"/>
+          </a:xfrm>
+          <a:prstGeom prst="rect">
+            <a:avLst/>
+          </a:prstGeom>
+          <a:noFill/>
+        </p:spPr>
+        <p:txBody>
+          <a:bodyPr wrap="square" anchor="t" lIns="0" rIns="0" tIns="0" bIns="0">
+            <a:spAutoFit/>
+          </a:bodyPr>
+          <a:lstStyle/>
+          <a:p>
+            <a:pPr algn="l"/>
+            <a:r>
+              <a:rPr sz="1000" b="0">
+                <a:solidFill>
+                  <a:srgbClr val="3F3F46"/>
+                </a:solidFill>
+                <a:latin typeface="Calibri"/>
+              </a:rPr>
+              <a:t>10 team seats</a:t>
+            </a:r>
+          </a:p>
+        </p:txBody>
+      </p:sp>
+      <p:sp>
+        <p:nvSpPr>
+          <p:cNvPr id="36" name="Oval 35"/>
+          <p:cNvSpPr/>
+          <p:nvPr/>
+        </p:nvSpPr>
+        <p:spPr>
+          <a:xfrm>
+            <a:off x="4617720" y="4782312"/>
+            <a:ext cx="91440" cy="91440"/>
+          </a:xfrm>
+          <a:prstGeom prst="ellipse">
+            <a:avLst/>
+          </a:prstGeom>
+          <a:solidFill>
+            <a:srgbClr val="10B981"/>
+          </a:solidFill>
+          <a:ln>
+            <a:noFill/>
+          </a:ln>
+        </p:spPr>
+        <p:style>
+          <a:lnRef idx="1">
+            <a:schemeClr val="accent1"/>
+          </a:lnRef>
+          <a:fillRef idx="3">
+            <a:schemeClr val="accent1"/>
+          </a:fillRef>
+          <a:effectRef idx="2">
+            <a:schemeClr val="accent1"/>
+          </a:effectRef>
+          <a:fontRef idx="minor">
+            <a:schemeClr val="lt1"/>
+          </a:fontRef>
+        </p:style>
+        <p:txBody>
+          <a:bodyPr rtlCol="0" anchor="ctr"/>
+          <a:lstStyle/>
+          <a:p>
+            <a:pPr algn="ctr"/>
+          </a:p>
+        </p:txBody>
+      </p:sp>
+      <p:sp>
+        <p:nvSpPr>
+          <p:cNvPr id="37" name="TextBox 36"/>
+          <p:cNvSpPr txBox="1"/>
+          <p:nvPr/>
+        </p:nvSpPr>
+        <p:spPr>
+          <a:xfrm>
+            <a:off x="4800600" y="4709160"/>
+            <a:ext cx="2926080" cy="274320"/>
+          </a:xfrm>
+          <a:prstGeom prst="rect">
+            <a:avLst/>
+          </a:prstGeom>
+          <a:noFill/>
+        </p:spPr>
+        <p:txBody>
+          <a:bodyPr wrap="square" anchor="t" lIns="0" rIns="0" tIns="0" bIns="0">
+            <a:spAutoFit/>
+          </a:bodyPr>
+          <a:lstStyle/>
+          <a:p>
+            <a:pPr algn="l"/>
+            <a:r>
+              <a:rPr sz="1000" b="0">
+                <a:solidFill>
+                  <a:srgbClr val="3F3F46"/>
+                </a:solidFill>
+                <a:latin typeface="Calibri"/>
+              </a:rPr>
+              <a:t>Signed PDF evidence</a:t>
+            </a:r>
+          </a:p>
+        </p:txBody>
+      </p:sp>
+      <p:sp>
+        <p:nvSpPr>
+          <p:cNvPr id="38" name="Oval 37"/>
+          <p:cNvSpPr/>
+          <p:nvPr/>
+        </p:nvSpPr>
+        <p:spPr>
+          <a:xfrm>
+            <a:off x="4617720" y="5102352"/>
+            <a:ext cx="91440" cy="91440"/>
+          </a:xfrm>
+          <a:prstGeom prst="ellipse">
+            <a:avLst/>
+          </a:prstGeom>
+          <a:solidFill>
+            <a:srgbClr val="10B981"/>
+          </a:solidFill>
+          <a:ln>
+            <a:noFill/>
+          </a:ln>
+        </p:spPr>
+        <p:style>
+          <a:lnRef idx="1">
+            <a:schemeClr val="accent1"/>
+          </a:lnRef>
+          <a:fillRef idx="3">
+            <a:schemeClr val="accent1"/>
+          </a:fillRef>
+          <a:effectRef idx="2">
+            <a:schemeClr val="accent1"/>
+          </a:effectRef>
+          <a:fontRef idx="minor">
+            <a:schemeClr val="lt1"/>
+          </a:fontRef>
+        </p:style>
+        <p:txBody>
+          <a:bodyPr rtlCol="0" anchor="ctr"/>
+          <a:lstStyle/>
+          <a:p>
+            <a:pPr algn="ctr"/>
+          </a:p>
+        </p:txBody>
+      </p:sp>
+      <p:sp>
+        <p:nvSpPr>
+          <p:cNvPr id="39" name="TextBox 38"/>
+          <p:cNvSpPr txBox="1"/>
+          <p:nvPr/>
+        </p:nvSpPr>
+        <p:spPr>
+          <a:xfrm>
+            <a:off x="4800600" y="5029200"/>
+            <a:ext cx="2926080" cy="274320"/>
+          </a:xfrm>
+          <a:prstGeom prst="rect">
+            <a:avLst/>
+          </a:prstGeom>
+          <a:noFill/>
+        </p:spPr>
+        <p:txBody>
+          <a:bodyPr wrap="square" anchor="t" lIns="0" rIns="0" tIns="0" bIns="0">
+            <a:spAutoFit/>
+          </a:bodyPr>
+          <a:lstStyle/>
+          <a:p>
+            <a:pPr algn="l"/>
+            <a:r>
+              <a:rPr sz="1000" b="0">
+                <a:solidFill>
+                  <a:srgbClr val="3F3F46"/>
+                </a:solidFill>
+                <a:latin typeface="Calibri"/>
+              </a:rPr>
+              <a:t>7-year retention</a:t>
+            </a:r>
+          </a:p>
+        </p:txBody>
+      </p:sp>
+      <p:sp>
+        <p:nvSpPr>
+          <p:cNvPr id="40" name="Oval 39"/>
+          <p:cNvSpPr/>
+          <p:nvPr/>
+        </p:nvSpPr>
+        <p:spPr>
+          <a:xfrm>
+            <a:off x="4617720" y="5422392"/>
+            <a:ext cx="91440" cy="91440"/>
+          </a:xfrm>
+          <a:prstGeom prst="ellipse">
+            <a:avLst/>
+          </a:prstGeom>
+          <a:solidFill>
+            <a:srgbClr val="10B981"/>
+          </a:solidFill>
+          <a:ln>
+            <a:noFill/>
+          </a:ln>
+        </p:spPr>
+        <p:style>
+          <a:lnRef idx="1">
+            <a:schemeClr val="accent1"/>
+          </a:lnRef>
+          <a:fillRef idx="3">
+            <a:schemeClr val="accent1"/>
+          </a:fillRef>
+          <a:effectRef idx="2">
+            <a:schemeClr val="accent1"/>
+          </a:effectRef>
+          <a:fontRef idx="minor">
+            <a:schemeClr val="lt1"/>
+          </a:fontRef>
+        </p:style>
+        <p:txBody>
+          <a:bodyPr rtlCol="0" anchor="ctr"/>
+          <a:lstStyle/>
+          <a:p>
+            <a:pPr algn="ctr"/>
+          </a:p>
+        </p:txBody>
+      </p:sp>
+      <p:sp>
+        <p:nvSpPr>
+          <p:cNvPr id="41" name="TextBox 40"/>
+          <p:cNvSpPr txBox="1"/>
+          <p:nvPr/>
+        </p:nvSpPr>
+        <p:spPr>
+          <a:xfrm>
+            <a:off x="4800600" y="5349240"/>
+            <a:ext cx="2926080" cy="274320"/>
+          </a:xfrm>
+          <a:prstGeom prst="rect">
+            <a:avLst/>
+          </a:prstGeom>
+          <a:noFill/>
+        </p:spPr>
+        <p:txBody>
+          <a:bodyPr wrap="square" anchor="t" lIns="0" rIns="0" tIns="0" bIns="0">
+            <a:spAutoFit/>
+          </a:bodyPr>
+          <a:lstStyle/>
+          <a:p>
+            <a:pPr algn="l"/>
+            <a:r>
+              <a:rPr sz="1000" b="0">
+                <a:solidFill>
+                  <a:srgbClr val="3F3F46"/>
+                </a:solidFill>
+                <a:latin typeface="Calibri"/>
+              </a:rPr>
+              <a:t>API &amp; webhooks · Slack alerts</a:t>
+            </a:r>
+          </a:p>
+        </p:txBody>
+      </p:sp>
+      <p:sp>
+        <p:nvSpPr>
+          <p:cNvPr id="42" name="Oval 41"/>
+          <p:cNvSpPr/>
+          <p:nvPr/>
+        </p:nvSpPr>
+        <p:spPr>
+          <a:xfrm>
+            <a:off x="4617720" y="5742432"/>
+            <a:ext cx="91440" cy="91440"/>
+          </a:xfrm>
+          <a:prstGeom prst="ellipse">
+            <a:avLst/>
+          </a:prstGeom>
+          <a:solidFill>
+            <a:srgbClr val="10B981"/>
+          </a:solidFill>
+          <a:ln>
+            <a:noFill/>
+          </a:ln>
+        </p:spPr>
+        <p:style>
+          <a:lnRef idx="1">
+            <a:schemeClr val="accent1"/>
+          </a:lnRef>
+          <a:fillRef idx="3">
+            <a:schemeClr val="accent1"/>
+          </a:fillRef>
+          <a:effectRef idx="2">
+            <a:schemeClr val="accent1"/>
+          </a:effectRef>
+          <a:fontRef idx="minor">
+            <a:schemeClr val="lt1"/>
+          </a:fontRef>
+        </p:style>
+        <p:txBody>
+          <a:bodyPr rtlCol="0" anchor="ctr"/>
+          <a:lstStyle/>
+          <a:p>
+            <a:pPr algn="ctr"/>
+          </a:p>
+        </p:txBody>
+      </p:sp>
+      <p:sp>
+        <p:nvSpPr>
+          <p:cNvPr id="43" name="TextBox 42"/>
+          <p:cNvSpPr txBox="1"/>
+          <p:nvPr/>
+        </p:nvSpPr>
+        <p:spPr>
+          <a:xfrm>
+            <a:off x="4800600" y="5669280"/>
+            <a:ext cx="2926080" cy="274320"/>
+          </a:xfrm>
+          <a:prstGeom prst="rect">
+            <a:avLst/>
+          </a:prstGeom>
+          <a:noFill/>
+        </p:spPr>
+        <p:txBody>
+          <a:bodyPr wrap="square" anchor="t" lIns="0" rIns="0" tIns="0" bIns="0">
+            <a:spAutoFit/>
+          </a:bodyPr>
+          <a:lstStyle/>
+          <a:p>
+            <a:pPr algn="l"/>
+            <a:r>
+              <a:rPr sz="1000" b="0">
+                <a:solidFill>
+                  <a:srgbClr val="3F3F46"/>
+                </a:solidFill>
+                <a:latin typeface="Calibri"/>
+              </a:rPr>
+              <a:t>Email support</a:t>
+            </a:r>
+          </a:p>
+        </p:txBody>
+      </p:sp>
+      <p:sp>
+        <p:nvSpPr>
+          <p:cNvPr id="44" name="Rounded Rectangle 43"/>
+          <p:cNvSpPr/>
+          <p:nvPr/>
+        </p:nvSpPr>
+        <p:spPr>
+          <a:xfrm>
+            <a:off x="8138160" y="1828800"/>
+            <a:ext cx="3657600" cy="4572000"/>
+          </a:xfrm>
+          <a:prstGeom prst="roundRect">
+            <a:avLst>
+              <a:gd name="adj" fmla="val 4000"/>
+            </a:avLst>
+          </a:prstGeom>
+          <a:solidFill>
+            <a:srgbClr val="FFFFFF"/>
+          </a:solidFill>
+          <a:ln w="25400">
+            <a:solidFill>
+              <a:srgbClr val="B45309"/>
+            </a:solidFill>
+          </a:ln>
+          <a:effectLst/>
+        </p:spPr>
+        <p:style>
+          <a:lnRef idx="1">
+            <a:schemeClr val="accent1"/>
+          </a:lnRef>
+          <a:fillRef idx="3">
+            <a:schemeClr val="accent1"/>
+          </a:fillRef>
+          <a:effectRef idx="2">
+            <a:schemeClr val="accent1"/>
+          </a:effectRef>
+          <a:fontRef idx="minor">
+            <a:schemeClr val="lt1"/>
+          </a:fontRef>
+        </p:style>
+        <p:txBody>
+          <a:bodyPr rtlCol="0" anchor="ctr"/>
+          <a:lstStyle/>
+          <a:p>
+            <a:pPr algn="ctr"/>
+          </a:p>
+        </p:txBody>
+      </p:sp>
+      <p:sp>
+        <p:nvSpPr>
+          <p:cNvPr id="45" name="Rounded Rectangle 44"/>
+          <p:cNvSpPr/>
+          <p:nvPr/>
+        </p:nvSpPr>
+        <p:spPr>
+          <a:xfrm>
+            <a:off x="8686800" y="1691640"/>
+            <a:ext cx="1828800" cy="274320"/>
+          </a:xfrm>
+          <a:prstGeom prst="roundRect">
+            <a:avLst>
+              <a:gd name="adj" fmla="val 50000"/>
+            </a:avLst>
+          </a:prstGeom>
+          <a:solidFill>
+            <a:srgbClr val="B45309"/>
+          </a:solidFill>
+          <a:ln>
+            <a:noFill/>
+          </a:ln>
+          <a:effectLst/>
+        </p:spPr>
+        <p:style>
+          <a:lnRef idx="1">
+            <a:schemeClr val="accent1"/>
+          </a:lnRef>
+          <a:fillRef idx="3">
+            <a:schemeClr val="accent1"/>
+          </a:fillRef>
+          <a:effectRef idx="2">
+            <a:schemeClr val="accent1"/>
+          </a:effectRef>
+          <a:fontRef idx="minor">
+            <a:schemeClr val="lt1"/>
+          </a:fontRef>
+        </p:style>
+        <p:txBody>
+          <a:bodyPr rtlCol="0" anchor="ctr"/>
+          <a:lstStyle/>
+          <a:p>
+            <a:pPr algn="ctr"/>
+          </a:p>
+        </p:txBody>
+      </p:sp>
+      <p:sp>
+        <p:nvSpPr>
+          <p:cNvPr id="46" name="TextBox 45"/>
+          <p:cNvSpPr txBox="1"/>
+          <p:nvPr/>
+        </p:nvSpPr>
+        <p:spPr>
+          <a:xfrm>
+            <a:off x="8686800" y="1709928"/>
+            <a:ext cx="1828800" cy="256032"/>
+          </a:xfrm>
+          <a:prstGeom prst="rect">
+            <a:avLst/>
+          </a:prstGeom>
+          <a:noFill/>
+        </p:spPr>
+        <p:txBody>
+          <a:bodyPr wrap="square" anchor="ctr" lIns="0" rIns="0" tIns="0" bIns="0">
+            <a:spAutoFit/>
+          </a:bodyPr>
+          <a:lstStyle/>
+          <a:p>
+            <a:pPr algn="ctr"/>
+            <a:r>
+              <a:rPr sz="800" b="1">
+                <a:solidFill>
+                  <a:srgbClr val="FFFFFF"/>
+                </a:solidFill>
+                <a:latin typeface="Calibri"/>
+              </a:rPr>
+              <a:t>MOST POPULAR</a:t>
+            </a:r>
+          </a:p>
+        </p:txBody>
+      </p:sp>
+      <p:sp>
+        <p:nvSpPr>
+          <p:cNvPr id="47" name="TextBox 46"/>
+          <p:cNvSpPr txBox="1"/>
+          <p:nvPr/>
+        </p:nvSpPr>
+        <p:spPr>
+          <a:xfrm>
+            <a:off x="8412480" y="2103120"/>
+            <a:ext cx="3108960" cy="365760"/>
+          </a:xfrm>
+          <a:prstGeom prst="rect">
+            <a:avLst/>
+          </a:prstGeom>
+          <a:noFill/>
+        </p:spPr>
+        <p:txBody>
+          <a:bodyPr wrap="square" anchor="t" lIns="0" rIns="0" tIns="0" bIns="0">
+            <a:spAutoFit/>
+          </a:bodyPr>
+          <a:lstStyle/>
+          <a:p>
+            <a:pPr algn="l"/>
+            <a:r>
+              <a:rPr sz="1600" b="1">
+                <a:solidFill>
+                  <a:srgbClr val="18181B"/>
+                </a:solidFill>
+                <a:latin typeface="Calibri"/>
+              </a:rPr>
+              <a:t>VIP</a:t>
+            </a:r>
+          </a:p>
+        </p:txBody>
+      </p:sp>
+      <p:sp>
+        <p:nvSpPr>
+          <p:cNvPr id="48" name="TextBox 47"/>
+          <p:cNvSpPr txBox="1"/>
+          <p:nvPr/>
+        </p:nvSpPr>
+        <p:spPr>
+          <a:xfrm>
+            <a:off x="8412480" y="2514600"/>
+            <a:ext cx="3108960" cy="548640"/>
+          </a:xfrm>
+          <a:prstGeom prst="rect">
+            <a:avLst/>
+          </a:prstGeom>
+          <a:noFill/>
+        </p:spPr>
+        <p:txBody>
+          <a:bodyPr wrap="square" anchor="t" lIns="0" rIns="0" tIns="0" bIns="0">
+            <a:spAutoFit/>
+          </a:bodyPr>
+          <a:lstStyle/>
+          <a:p>
+            <a:pPr algn="l"/>
+            <a:r>
+              <a:rPr sz="3400" b="1">
+                <a:solidFill>
+                  <a:srgbClr val="18181B"/>
+                </a:solidFill>
+                <a:latin typeface="Calibri"/>
+              </a:rPr>
+              <a:t>$299</a:t>
+            </a:r>
+          </a:p>
+        </p:txBody>
+      </p:sp>
+      <p:sp>
+        <p:nvSpPr>
+          <p:cNvPr id="49" name="TextBox 48"/>
+          <p:cNvSpPr txBox="1"/>
+          <p:nvPr/>
+        </p:nvSpPr>
+        <p:spPr>
+          <a:xfrm>
+            <a:off x="9692640" y="2743200"/>
+            <a:ext cx="1371600" cy="365760"/>
+          </a:xfrm>
+          <a:prstGeom prst="rect">
+            <a:avLst/>
+          </a:prstGeom>
+          <a:noFill/>
+        </p:spPr>
+        <p:txBody>
+          <a:bodyPr wrap="square" anchor="t" lIns="0" rIns="0" tIns="0" bIns="0">
+            <a:spAutoFit/>
+          </a:bodyPr>
+          <a:lstStyle/>
+          <a:p>
+            <a:pPr algn="l"/>
+            <a:r>
+              <a:rPr sz="1100" b="0">
+                <a:solidFill>
+                  <a:srgbClr val="71717A"/>
+                </a:solidFill>
+                <a:latin typeface="Calibri"/>
+              </a:rPr>
+              <a:t>/mo</a:t>
+            </a:r>
+          </a:p>
+        </p:txBody>
+      </p:sp>
+      <p:sp>
+        <p:nvSpPr>
+          <p:cNvPr id="50" name="Rounded Rectangle 49"/>
+          <p:cNvSpPr/>
+          <p:nvPr/>
+        </p:nvSpPr>
+        <p:spPr>
+          <a:xfrm>
+            <a:off x="8412480" y="3291840"/>
+            <a:ext cx="3108960" cy="594360"/>
+          </a:xfrm>
+          <a:prstGeom prst="roundRect">
+            <a:avLst>
+              <a:gd name="adj" fmla="val 8000"/>
+            </a:avLst>
+          </a:prstGeom>
+          <a:solidFill>
+            <a:srgbClr val="FFFBEB"/>
+          </a:solidFill>
+          <a:ln>
+            <a:noFill/>
+          </a:ln>
+          <a:effectLst/>
+        </p:spPr>
+        <p:style>
+          <a:lnRef idx="1">
+            <a:schemeClr val="accent1"/>
+          </a:lnRef>
+          <a:fillRef idx="3">
+            <a:schemeClr val="accent1"/>
+          </a:fillRef>
+          <a:effectRef idx="2">
+            <a:schemeClr val="accent1"/>
+          </a:effectRef>
+          <a:fontRef idx="minor">
+            <a:schemeClr val="lt1"/>
+          </a:fontRef>
+        </p:style>
+        <p:txBody>
+          <a:bodyPr rtlCol="0" anchor="ctr"/>
+          <a:lstStyle/>
+          <a:p>
+            <a:pPr algn="ctr"/>
+          </a:p>
+        </p:txBody>
+      </p:sp>
+      <p:sp>
+        <p:nvSpPr>
           <p:cNvPr id="51" name="TextBox 50"/>
           <p:cNvSpPr txBox="1"/>
           <p:nvPr/>
@@ -19254,7 +19254,7 @@
             <a:r>
               <a:rPr sz="900" b="1">
                 <a:solidFill>
-                  <a:srgbClr val="283C5D"/>
+                  <a:srgbClr val="B45309"/>
                 </a:solidFill>
                 <a:latin typeface="Calibri"/>
               </a:rPr>
@@ -19289,11 +19289,11 @@
             <a:r>
               <a:rPr sz="1400" b="1">
                 <a:solidFill>
-                  <a:srgbClr val="21304A"/>
-                </a:solidFill>
-                <a:latin typeface="Calibri"/>
-              </a:rPr>
-              <a:t>Hourly</a:t>
+                  <a:srgbClr val="92400E"/>
+                </a:solidFill>
+                <a:latin typeface="Calibri"/>
+              </a:rPr>
+              <a:t>Daily</a:t>
             </a:r>
           </a:p>
         </p:txBody>
@@ -19834,7 +19834,7 @@
             <a:avLst/>
           </a:prstGeom>
           <a:solidFill>
-            <a:srgbClr val="283C5D"/>
+            <a:srgbClr val="B45309"/>
           </a:solidFill>
           <a:ln>
             <a:noFill/>
@@ -19889,7 +19889,7 @@
             <a:r>
               <a:rPr sz="1000" b="1">
                 <a:solidFill>
-                  <a:srgbClr val="283C5D"/>
+                  <a:srgbClr val="B45309"/>
                 </a:solidFill>
                 <a:latin typeface="Calibri"/>
               </a:rPr>
@@ -20252,7 +20252,7 @@
             </a:avLst>
           </a:prstGeom>
           <a:solidFill>
-            <a:srgbClr val="EEF2F8"/>
+            <a:srgbClr val="FFFBEB"/>
           </a:solidFill>
           <a:ln>
             <a:noFill/>
@@ -20307,7 +20307,7 @@
             <a:r>
               <a:rPr sz="1000" b="1">
                 <a:solidFill>
-                  <a:srgbClr val="283C5D"/>
+                  <a:srgbClr val="B45309"/>
                 </a:solidFill>
                 <a:latin typeface="Calibri"/>
               </a:rPr>
@@ -20342,7 +20342,7 @@
             <a:r>
               <a:rPr sz="1400" b="1">
                 <a:solidFill>
-                  <a:srgbClr val="283C5D"/>
+                  <a:srgbClr val="B45309"/>
                 </a:solidFill>
                 <a:latin typeface="Calibri"/>
               </a:rPr>
@@ -21165,7 +21165,7 @@
             <a:avLst/>
           </a:prstGeom>
           <a:solidFill>
-            <a:srgbClr val="283C5D"/>
+            <a:srgbClr val="B45309"/>
           </a:solidFill>
           <a:ln>
             <a:noFill/>
@@ -21220,7 +21220,7 @@
             <a:r>
               <a:rPr sz="1100" b="1">
                 <a:solidFill>
-                  <a:srgbClr val="283C5D"/>
+                  <a:srgbClr val="B45309"/>
                 </a:solidFill>
                 <a:latin typeface="Calibri"/>
               </a:rPr>
@@ -21244,7 +21244,7 @@
             <a:avLst/>
           </a:prstGeom>
           <a:solidFill>
-            <a:srgbClr val="283C5D"/>
+            <a:srgbClr val="B45309"/>
           </a:solidFill>
           <a:ln>
             <a:noFill/>
@@ -21322,7 +21322,7 @@
             <a:avLst/>
           </a:prstGeom>
           <a:solidFill>
-            <a:srgbClr val="283C5D"/>
+            <a:srgbClr val="B45309"/>
           </a:solidFill>
           <a:ln>
             <a:noFill/>
@@ -21400,7 +21400,7 @@
             <a:avLst/>
           </a:prstGeom>
           <a:solidFill>
-            <a:srgbClr val="283C5D"/>
+            <a:srgbClr val="B45309"/>
           </a:solidFill>
           <a:ln>
             <a:noFill/>
@@ -21478,7 +21478,7 @@
             <a:avLst/>
           </a:prstGeom>
           <a:solidFill>
-            <a:srgbClr val="283C5D"/>
+            <a:srgbClr val="B45309"/>
           </a:solidFill>
           <a:ln>
             <a:noFill/>
@@ -21556,7 +21556,7 @@
             <a:avLst/>
           </a:prstGeom>
           <a:solidFill>
-            <a:srgbClr val="283C5D"/>
+            <a:srgbClr val="B45309"/>
           </a:solidFill>
           <a:ln>
             <a:noFill/>
@@ -21634,7 +21634,7 @@
             <a:avLst/>
           </a:prstGeom>
           <a:solidFill>
-            <a:srgbClr val="283C5D"/>
+            <a:srgbClr val="B45309"/>
           </a:solidFill>
           <a:ln>
             <a:noFill/>
@@ -21712,7 +21712,7 @@
             <a:avLst/>
           </a:prstGeom>
           <a:solidFill>
-            <a:srgbClr val="283C5D"/>
+            <a:srgbClr val="B45309"/>
           </a:solidFill>
           <a:ln>
             <a:noFill/>
@@ -21790,7 +21790,7 @@
             <a:avLst/>
           </a:prstGeom>
           <a:solidFill>
-            <a:srgbClr val="283C5D"/>
+            <a:srgbClr val="B45309"/>
           </a:solidFill>
           <a:ln>
             <a:noFill/>

--- a/docs/presentations/Selket_Investor_Deck.pptx
+++ b/docs/presentations/Selket_Investor_Deck.pptx
@@ -3113,7 +3113,7 @@
             <a:avLst/>
           </a:prstGeom>
           <a:solidFill>
-            <a:srgbClr val="78350F"/>
+            <a:srgbClr val="7F1D1D"/>
           </a:solidFill>
           <a:ln>
             <a:noFill/>
@@ -3157,7 +3157,7 @@
             <a:avLst/>
           </a:prstGeom>
           <a:solidFill>
-            <a:srgbClr val="92400E"/>
+            <a:srgbClr val="991B1B"/>
           </a:solidFill>
           <a:ln>
             <a:noFill/>
@@ -3258,7 +3258,7 @@
             <a:r>
               <a:rPr sz="2200" b="1">
                 <a:solidFill>
-                  <a:srgbClr val="B45309"/>
+                  <a:srgbClr val="B91C1C"/>
                 </a:solidFill>
                 <a:latin typeface="Calibri"/>
               </a:rPr>
@@ -3319,7 +3319,7 @@
             </a:avLst>
           </a:prstGeom>
           <a:solidFill>
-            <a:srgbClr val="B45309"/>
+            <a:srgbClr val="B91C1C"/>
           </a:solidFill>
           <a:ln>
             <a:noFill/>
@@ -3374,7 +3374,7 @@
             <a:r>
               <a:rPr sz="1000" b="1">
                 <a:solidFill>
-                  <a:srgbClr val="FEF3C7"/>
+                  <a:srgbClr val="FEE2E2"/>
                 </a:solidFill>
                 <a:latin typeface="Calibri"/>
               </a:rPr>
@@ -3445,7 +3445,7 @@
             <a:r>
               <a:rPr sz="1800" b="0">
                 <a:solidFill>
-                  <a:srgbClr val="FEF3C7"/>
+                  <a:srgbClr val="FEE2E2"/>
                 </a:solidFill>
                 <a:latin typeface="Calibri"/>
               </a:rPr>
@@ -3481,7 +3481,7 @@
             <a:r>
               <a:rPr sz="1100" b="0">
                 <a:solidFill>
-                  <a:srgbClr val="FCD34D"/>
+                  <a:srgbClr val="FCA5A5"/>
                 </a:solidFill>
                 <a:latin typeface="Calibri"/>
               </a:rPr>
@@ -3523,7 +3523,7 @@
             <a:avLst/>
           </a:prstGeom>
           <a:solidFill>
-            <a:srgbClr val="B45309"/>
+            <a:srgbClr val="B91C1C"/>
           </a:solidFill>
           <a:ln>
             <a:noFill/>
@@ -3578,7 +3578,7 @@
             <a:r>
               <a:rPr sz="1000" b="1">
                 <a:solidFill>
-                  <a:srgbClr val="B45309"/>
+                  <a:srgbClr val="B91C1C"/>
                 </a:solidFill>
                 <a:latin typeface="Calibri"/>
               </a:rPr>
@@ -3757,7 +3757,7 @@
             </a:avLst>
           </a:prstGeom>
           <a:solidFill>
-            <a:srgbClr val="B45309"/>
+            <a:srgbClr val="B91C1C"/>
           </a:solidFill>
           <a:ln>
             <a:noFill/>
@@ -3871,7 +3871,7 @@
             <a:avLst/>
           </a:prstGeom>
           <a:solidFill>
-            <a:srgbClr val="B45309"/>
+            <a:srgbClr val="B91C1C"/>
           </a:solidFill>
           <a:ln>
             <a:noFill/>
@@ -3949,7 +3949,7 @@
             <a:avLst/>
           </a:prstGeom>
           <a:solidFill>
-            <a:srgbClr val="B45309"/>
+            <a:srgbClr val="B91C1C"/>
           </a:solidFill>
           <a:ln>
             <a:noFill/>
@@ -4027,7 +4027,7 @@
             <a:avLst/>
           </a:prstGeom>
           <a:solidFill>
-            <a:srgbClr val="B45309"/>
+            <a:srgbClr val="B91C1C"/>
           </a:solidFill>
           <a:ln>
             <a:noFill/>
@@ -4105,7 +4105,7 @@
             <a:avLst/>
           </a:prstGeom>
           <a:solidFill>
-            <a:srgbClr val="B45309"/>
+            <a:srgbClr val="B91C1C"/>
           </a:solidFill>
           <a:ln>
             <a:noFill/>
@@ -4183,7 +4183,7 @@
             <a:avLst/>
           </a:prstGeom>
           <a:solidFill>
-            <a:srgbClr val="B45309"/>
+            <a:srgbClr val="B91C1C"/>
           </a:solidFill>
           <a:ln>
             <a:noFill/>
@@ -4311,7 +4311,7 @@
             </a:avLst>
           </a:prstGeom>
           <a:solidFill>
-            <a:srgbClr val="F59E0B"/>
+            <a:srgbClr val="EF4444"/>
           </a:solidFill>
           <a:ln>
             <a:noFill/>
@@ -4425,7 +4425,7 @@
             <a:avLst/>
           </a:prstGeom>
           <a:solidFill>
-            <a:srgbClr val="F59E0B"/>
+            <a:srgbClr val="EF4444"/>
           </a:solidFill>
           <a:ln>
             <a:noFill/>
@@ -4503,7 +4503,7 @@
             <a:avLst/>
           </a:prstGeom>
           <a:solidFill>
-            <a:srgbClr val="F59E0B"/>
+            <a:srgbClr val="EF4444"/>
           </a:solidFill>
           <a:ln>
             <a:noFill/>
@@ -4581,7 +4581,7 @@
             <a:avLst/>
           </a:prstGeom>
           <a:solidFill>
-            <a:srgbClr val="F59E0B"/>
+            <a:srgbClr val="EF4444"/>
           </a:solidFill>
           <a:ln>
             <a:noFill/>
@@ -4659,7 +4659,7 @@
             <a:avLst/>
           </a:prstGeom>
           <a:solidFill>
-            <a:srgbClr val="F59E0B"/>
+            <a:srgbClr val="EF4444"/>
           </a:solidFill>
           <a:ln>
             <a:noFill/>
@@ -4737,7 +4737,7 @@
             <a:avLst/>
           </a:prstGeom>
           <a:solidFill>
-            <a:srgbClr val="F59E0B"/>
+            <a:srgbClr val="EF4444"/>
           </a:solidFill>
           <a:ln>
             <a:noFill/>
@@ -4865,7 +4865,7 @@
             </a:avLst>
           </a:prstGeom>
           <a:solidFill>
-            <a:srgbClr val="FCD34D"/>
+            <a:srgbClr val="FCA5A5"/>
           </a:solidFill>
           <a:ln>
             <a:noFill/>
@@ -4979,7 +4979,7 @@
             <a:avLst/>
           </a:prstGeom>
           <a:solidFill>
-            <a:srgbClr val="FCD34D"/>
+            <a:srgbClr val="FCA5A5"/>
           </a:solidFill>
           <a:ln>
             <a:noFill/>
@@ -5057,7 +5057,7 @@
             <a:avLst/>
           </a:prstGeom>
           <a:solidFill>
-            <a:srgbClr val="FCD34D"/>
+            <a:srgbClr val="FCA5A5"/>
           </a:solidFill>
           <a:ln>
             <a:noFill/>
@@ -5135,7 +5135,7 @@
             <a:avLst/>
           </a:prstGeom>
           <a:solidFill>
-            <a:srgbClr val="FCD34D"/>
+            <a:srgbClr val="FCA5A5"/>
           </a:solidFill>
           <a:ln>
             <a:noFill/>
@@ -5213,7 +5213,7 @@
             <a:avLst/>
           </a:prstGeom>
           <a:solidFill>
-            <a:srgbClr val="FCD34D"/>
+            <a:srgbClr val="FCA5A5"/>
           </a:solidFill>
           <a:ln>
             <a:noFill/>
@@ -5291,7 +5291,7 @@
             <a:avLst/>
           </a:prstGeom>
           <a:solidFill>
-            <a:srgbClr val="FCD34D"/>
+            <a:srgbClr val="FCA5A5"/>
           </a:solidFill>
           <a:ln>
             <a:noFill/>
@@ -5387,7 +5387,7 @@
             <a:avLst/>
           </a:prstGeom>
           <a:solidFill>
-            <a:srgbClr val="78350F"/>
+            <a:srgbClr val="7F1D1D"/>
           </a:solidFill>
           <a:ln>
             <a:noFill/>
@@ -5431,7 +5431,7 @@
             <a:avLst/>
           </a:prstGeom>
           <a:solidFill>
-            <a:srgbClr val="92400E"/>
+            <a:srgbClr val="991B1B"/>
           </a:solidFill>
           <a:ln>
             <a:noFill/>
@@ -5486,7 +5486,7 @@
             <a:r>
               <a:rPr sz="1400" b="1">
                 <a:solidFill>
-                  <a:srgbClr val="FCD34D"/>
+                  <a:srgbClr val="FCA5A5"/>
                 </a:solidFill>
                 <a:latin typeface="Calibri"/>
               </a:rPr>
@@ -5557,7 +5557,7 @@
             <a:r>
               <a:rPr sz="1800" b="0">
                 <a:solidFill>
-                  <a:srgbClr val="FEF3C7"/>
+                  <a:srgbClr val="FEE2E2"/>
                 </a:solidFill>
                 <a:latin typeface="Calibri"/>
               </a:rPr>
@@ -5583,7 +5583,7 @@
             </a:avLst>
           </a:prstGeom>
           <a:solidFill>
-            <a:srgbClr val="B45309"/>
+            <a:srgbClr val="B91C1C"/>
           </a:solidFill>
           <a:ln>
             <a:noFill/>
@@ -5638,7 +5638,7 @@
             <a:r>
               <a:rPr sz="1000" b="1">
                 <a:solidFill>
-                  <a:srgbClr val="FCD34D"/>
+                  <a:srgbClr val="FCA5A5"/>
                 </a:solidFill>
                 <a:latin typeface="Calibri"/>
               </a:rPr>
@@ -5708,7 +5708,7 @@
             <a:r>
               <a:rPr sz="1200" b="0">
                 <a:solidFill>
-                  <a:srgbClr val="FEF3C7"/>
+                  <a:srgbClr val="FEE2E2"/>
                 </a:solidFill>
                 <a:latin typeface="Consolas"/>
               </a:rPr>
@@ -5750,7 +5750,7 @@
             <a:avLst/>
           </a:prstGeom>
           <a:solidFill>
-            <a:srgbClr val="B45309"/>
+            <a:srgbClr val="B91C1C"/>
           </a:solidFill>
           <a:ln>
             <a:noFill/>
@@ -5805,7 +5805,7 @@
             <a:r>
               <a:rPr sz="1000" b="1">
                 <a:solidFill>
-                  <a:srgbClr val="B45309"/>
+                  <a:srgbClr val="B91C1C"/>
                 </a:solidFill>
                 <a:latin typeface="Calibri"/>
               </a:rPr>
@@ -6179,7 +6179,7 @@
             <a:avLst/>
           </a:prstGeom>
           <a:solidFill>
-            <a:srgbClr val="B45309"/>
+            <a:srgbClr val="B91C1C"/>
           </a:solidFill>
           <a:ln>
             <a:noFill/>
@@ -6376,7 +6376,7 @@
             <a:avLst/>
           </a:prstGeom>
           <a:solidFill>
-            <a:srgbClr val="B45309"/>
+            <a:srgbClr val="B91C1C"/>
           </a:solidFill>
           <a:ln>
             <a:noFill/>
@@ -6708,7 +6708,7 @@
             <a:avLst/>
           </a:prstGeom>
           <a:solidFill>
-            <a:srgbClr val="B45309"/>
+            <a:srgbClr val="B91C1C"/>
           </a:solidFill>
           <a:ln>
             <a:noFill/>
@@ -6763,7 +6763,7 @@
             <a:r>
               <a:rPr sz="1000" b="1">
                 <a:solidFill>
-                  <a:srgbClr val="B45309"/>
+                  <a:srgbClr val="B91C1C"/>
                 </a:solidFill>
                 <a:latin typeface="Calibri"/>
               </a:rPr>
@@ -6894,11 +6894,11 @@
             </a:avLst>
           </a:prstGeom>
           <a:solidFill>
-            <a:srgbClr val="FFFBEB"/>
+            <a:srgbClr val="FEF2F2"/>
           </a:solidFill>
           <a:ln w="9525">
             <a:solidFill>
-              <a:srgbClr val="FEF3C7"/>
+              <a:srgbClr val="FEE2E2"/>
             </a:solidFill>
           </a:ln>
           <a:effectLst/>
@@ -6940,7 +6940,7 @@
             <a:avLst/>
           </a:prstGeom>
           <a:solidFill>
-            <a:srgbClr val="B45309"/>
+            <a:srgbClr val="B91C1C"/>
           </a:solidFill>
           <a:ln>
             <a:noFill/>
@@ -7070,7 +7070,7 @@
             </a:avLst>
           </a:prstGeom>
           <a:solidFill>
-            <a:srgbClr val="B45309"/>
+            <a:srgbClr val="B91C1C"/>
           </a:solidFill>
           <a:ln>
             <a:noFill/>
@@ -7220,7 +7220,7 @@
             <a:avLst/>
           </a:prstGeom>
           <a:solidFill>
-            <a:srgbClr val="FCD34D"/>
+            <a:srgbClr val="FCA5A5"/>
           </a:solidFill>
           <a:ln>
             <a:noFill/>
@@ -7313,7 +7313,7 @@
             </a:avLst>
           </a:prstGeom>
           <a:solidFill>
-            <a:srgbClr val="B45309"/>
+            <a:srgbClr val="B91C1C"/>
           </a:solidFill>
           <a:ln>
             <a:noFill/>
@@ -7463,7 +7463,7 @@
             <a:avLst/>
           </a:prstGeom>
           <a:solidFill>
-            <a:srgbClr val="FCD34D"/>
+            <a:srgbClr val="FCA5A5"/>
           </a:solidFill>
           <a:ln>
             <a:noFill/>
@@ -7556,7 +7556,7 @@
             </a:avLst>
           </a:prstGeom>
           <a:solidFill>
-            <a:srgbClr val="B45309"/>
+            <a:srgbClr val="B91C1C"/>
           </a:solidFill>
           <a:ln>
             <a:noFill/>
@@ -7706,7 +7706,7 @@
             <a:avLst/>
           </a:prstGeom>
           <a:solidFill>
-            <a:srgbClr val="FCD34D"/>
+            <a:srgbClr val="FCA5A5"/>
           </a:solidFill>
           <a:ln>
             <a:noFill/>
@@ -7799,7 +7799,7 @@
             </a:avLst>
           </a:prstGeom>
           <a:solidFill>
-            <a:srgbClr val="B45309"/>
+            <a:srgbClr val="B91C1C"/>
           </a:solidFill>
           <a:ln>
             <a:noFill/>
@@ -7949,7 +7949,7 @@
             <a:avLst/>
           </a:prstGeom>
           <a:solidFill>
-            <a:srgbClr val="FCD34D"/>
+            <a:srgbClr val="FCA5A5"/>
           </a:solidFill>
           <a:ln>
             <a:noFill/>
@@ -8042,7 +8042,7 @@
             </a:avLst>
           </a:prstGeom>
           <a:solidFill>
-            <a:srgbClr val="B45309"/>
+            <a:srgbClr val="B91C1C"/>
           </a:solidFill>
           <a:ln>
             <a:noFill/>
@@ -8328,7 +8328,7 @@
             <a:avLst/>
           </a:prstGeom>
           <a:solidFill>
-            <a:srgbClr val="B45309"/>
+            <a:srgbClr val="B91C1C"/>
           </a:solidFill>
           <a:ln>
             <a:noFill/>
@@ -8383,7 +8383,7 @@
             <a:r>
               <a:rPr sz="1000" b="1">
                 <a:solidFill>
-                  <a:srgbClr val="B45309"/>
+                  <a:srgbClr val="B91C1C"/>
                 </a:solidFill>
                 <a:latin typeface="Calibri"/>
               </a:rPr>
@@ -8562,7 +8562,7 @@
             </a:avLst>
           </a:prstGeom>
           <a:solidFill>
-            <a:srgbClr val="B45309"/>
+            <a:srgbClr val="B91C1C"/>
           </a:solidFill>
           <a:ln>
             <a:noFill/>
@@ -8687,7 +8687,7 @@
             <a:r>
               <a:rPr sz="1000" b="1">
                 <a:solidFill>
-                  <a:srgbClr val="F59E0B"/>
+                  <a:srgbClr val="EF4444"/>
                 </a:solidFill>
                 <a:latin typeface="Calibri"/>
               </a:rPr>
@@ -8748,7 +8748,7 @@
             <a:avLst/>
           </a:prstGeom>
           <a:solidFill>
-            <a:srgbClr val="FCD34D"/>
+            <a:srgbClr val="FCA5A5"/>
           </a:solidFill>
           <a:ln>
             <a:noFill/>
@@ -8841,7 +8841,7 @@
             </a:avLst>
           </a:prstGeom>
           <a:solidFill>
-            <a:srgbClr val="B45309"/>
+            <a:srgbClr val="B91C1C"/>
           </a:solidFill>
           <a:ln>
             <a:noFill/>
@@ -8966,7 +8966,7 @@
             <a:r>
               <a:rPr sz="1000" b="1">
                 <a:solidFill>
-                  <a:srgbClr val="F59E0B"/>
+                  <a:srgbClr val="EF4444"/>
                 </a:solidFill>
                 <a:latin typeface="Calibri"/>
               </a:rPr>
@@ -9028,7 +9028,7 @@
             <a:avLst/>
           </a:prstGeom>
           <a:solidFill>
-            <a:srgbClr val="FCD34D"/>
+            <a:srgbClr val="FCA5A5"/>
           </a:solidFill>
           <a:ln>
             <a:noFill/>
@@ -9121,7 +9121,7 @@
             </a:avLst>
           </a:prstGeom>
           <a:solidFill>
-            <a:srgbClr val="B45309"/>
+            <a:srgbClr val="B91C1C"/>
           </a:solidFill>
           <a:ln>
             <a:noFill/>
@@ -9246,7 +9246,7 @@
             <a:r>
               <a:rPr sz="1000" b="1">
                 <a:solidFill>
-                  <a:srgbClr val="F59E0B"/>
+                  <a:srgbClr val="EF4444"/>
                 </a:solidFill>
                 <a:latin typeface="Calibri"/>
               </a:rPr>
@@ -9307,7 +9307,7 @@
             <a:avLst/>
           </a:prstGeom>
           <a:solidFill>
-            <a:srgbClr val="FCD34D"/>
+            <a:srgbClr val="FCA5A5"/>
           </a:solidFill>
           <a:ln>
             <a:noFill/>
@@ -9400,7 +9400,7 @@
             </a:avLst>
           </a:prstGeom>
           <a:solidFill>
-            <a:srgbClr val="B45309"/>
+            <a:srgbClr val="B91C1C"/>
           </a:solidFill>
           <a:ln>
             <a:noFill/>
@@ -9525,7 +9525,7 @@
             <a:r>
               <a:rPr sz="1000" b="1">
                 <a:solidFill>
-                  <a:srgbClr val="F59E0B"/>
+                  <a:srgbClr val="EF4444"/>
                 </a:solidFill>
                 <a:latin typeface="Calibri"/>
               </a:rPr>
@@ -9588,11 +9588,11 @@
             </a:avLst>
           </a:prstGeom>
           <a:solidFill>
-            <a:srgbClr val="FFFBEB"/>
+            <a:srgbClr val="FEF2F2"/>
           </a:solidFill>
           <a:ln w="9525">
             <a:solidFill>
-              <a:srgbClr val="FEF3C7"/>
+              <a:srgbClr val="FEE2E2"/>
             </a:solidFill>
           </a:ln>
           <a:effectLst/>
@@ -9645,7 +9645,7 @@
             <a:r>
               <a:rPr sz="1000" b="1">
                 <a:solidFill>
-                  <a:srgbClr val="B45309"/>
+                  <a:srgbClr val="B91C1C"/>
                 </a:solidFill>
                 <a:latin typeface="Calibri"/>
               </a:rPr>
@@ -9840,7 +9840,7 @@
             <a:avLst/>
           </a:prstGeom>
           <a:solidFill>
-            <a:srgbClr val="B45309"/>
+            <a:srgbClr val="B91C1C"/>
           </a:solidFill>
           <a:ln>
             <a:noFill/>
@@ -9895,7 +9895,7 @@
             <a:r>
               <a:rPr sz="1000" b="1">
                 <a:solidFill>
-                  <a:srgbClr val="B45309"/>
+                  <a:srgbClr val="B91C1C"/>
                 </a:solidFill>
                 <a:latin typeface="Calibri"/>
               </a:rPr>
@@ -11518,7 +11518,7 @@
             <a:r>
               <a:rPr sz="1100" b="1">
                 <a:solidFill>
-                  <a:srgbClr val="B45309"/>
+                  <a:srgbClr val="B91C1C"/>
                 </a:solidFill>
                 <a:latin typeface="Calibri"/>
               </a:rPr>
@@ -12464,7 +12464,7 @@
             <a:avLst/>
           </a:prstGeom>
           <a:solidFill>
-            <a:srgbClr val="B45309"/>
+            <a:srgbClr val="B91C1C"/>
           </a:solidFill>
           <a:ln>
             <a:noFill/>
@@ -12519,7 +12519,7 @@
             <a:r>
               <a:rPr sz="1000" b="1">
                 <a:solidFill>
-                  <a:srgbClr val="B45309"/>
+                  <a:srgbClr val="B91C1C"/>
                 </a:solidFill>
                 <a:latin typeface="Calibri"/>
               </a:rPr>
@@ -15807,7 +15807,7 @@
             <a:avLst/>
           </a:prstGeom>
           <a:solidFill>
-            <a:srgbClr val="B45309"/>
+            <a:srgbClr val="B91C1C"/>
           </a:solidFill>
           <a:ln>
             <a:noFill/>
@@ -15862,7 +15862,7 @@
             <a:r>
               <a:rPr sz="1000" b="1">
                 <a:solidFill>
-                  <a:srgbClr val="B45309"/>
+                  <a:srgbClr val="B91C1C"/>
                 </a:solidFill>
                 <a:latin typeface="Calibri"/>
               </a:rPr>
@@ -16039,7 +16039,7 @@
             <a:avLst/>
           </a:prstGeom>
           <a:solidFill>
-            <a:srgbClr val="B45309"/>
+            <a:srgbClr val="B91C1C"/>
           </a:solidFill>
           <a:ln>
             <a:noFill/>
@@ -16165,7 +16165,7 @@
             <a:r>
               <a:rPr sz="900" b="1">
                 <a:solidFill>
-                  <a:srgbClr val="B45309"/>
+                  <a:srgbClr val="B91C1C"/>
                 </a:solidFill>
                 <a:latin typeface="Calibri"/>
               </a:rPr>
@@ -16471,7 +16471,7 @@
             <a:avLst/>
           </a:prstGeom>
           <a:solidFill>
-            <a:srgbClr val="B45309"/>
+            <a:srgbClr val="B91C1C"/>
           </a:solidFill>
           <a:ln>
             <a:noFill/>
@@ -16597,7 +16597,7 @@
             <a:r>
               <a:rPr sz="900" b="1">
                 <a:solidFill>
-                  <a:srgbClr val="B45309"/>
+                  <a:srgbClr val="B91C1C"/>
                 </a:solidFill>
                 <a:latin typeface="Calibri"/>
               </a:rPr>
@@ -16903,7 +16903,7 @@
             <a:avLst/>
           </a:prstGeom>
           <a:solidFill>
-            <a:srgbClr val="B45309"/>
+            <a:srgbClr val="B91C1C"/>
           </a:solidFill>
           <a:ln>
             <a:noFill/>
@@ -17029,7 +17029,7 @@
             <a:r>
               <a:rPr sz="900" b="1">
                 <a:solidFill>
-                  <a:srgbClr val="B45309"/>
+                  <a:srgbClr val="B91C1C"/>
                 </a:solidFill>
                 <a:latin typeface="Calibri"/>
               </a:rPr>
@@ -17340,7 +17340,7 @@
             <a:avLst/>
           </a:prstGeom>
           <a:solidFill>
-            <a:srgbClr val="B45309"/>
+            <a:srgbClr val="B91C1C"/>
           </a:solidFill>
           <a:ln>
             <a:noFill/>
@@ -17395,7 +17395,7 @@
             <a:r>
               <a:rPr sz="1000" b="1">
                 <a:solidFill>
-                  <a:srgbClr val="B45309"/>
+                  <a:srgbClr val="B91C1C"/>
                 </a:solidFill>
                 <a:latin typeface="Calibri"/>
               </a:rPr>
@@ -17644,7 +17644,7 @@
             </a:avLst>
           </a:prstGeom>
           <a:solidFill>
-            <a:srgbClr val="FFFBEB"/>
+            <a:srgbClr val="FEF2F2"/>
           </a:solidFill>
           <a:ln>
             <a:noFill/>
@@ -17699,7 +17699,7 @@
             <a:r>
               <a:rPr sz="900" b="1">
                 <a:solidFill>
-                  <a:srgbClr val="B45309"/>
+                  <a:srgbClr val="B91C1C"/>
                 </a:solidFill>
                 <a:latin typeface="Calibri"/>
               </a:rPr>
@@ -17734,7 +17734,7 @@
             <a:r>
               <a:rPr sz="1400" b="1">
                 <a:solidFill>
-                  <a:srgbClr val="92400E"/>
+                  <a:srgbClr val="991B1B"/>
                 </a:solidFill>
                 <a:latin typeface="Calibri"/>
               </a:rPr>
@@ -18381,7 +18381,7 @@
             </a:avLst>
           </a:prstGeom>
           <a:solidFill>
-            <a:srgbClr val="FFFBEB"/>
+            <a:srgbClr val="FEF2F2"/>
           </a:solidFill>
           <a:ln>
             <a:noFill/>
@@ -18436,7 +18436,7 @@
             <a:r>
               <a:rPr sz="900" b="1">
                 <a:solidFill>
-                  <a:srgbClr val="B45309"/>
+                  <a:srgbClr val="B91C1C"/>
                 </a:solidFill>
                 <a:latin typeface="Calibri"/>
               </a:rPr>
@@ -18471,7 +18471,7 @@
             <a:r>
               <a:rPr sz="1400" b="1">
                 <a:solidFill>
-                  <a:srgbClr val="92400E"/>
+                  <a:srgbClr val="991B1B"/>
                 </a:solidFill>
                 <a:latin typeface="Calibri"/>
               </a:rPr>
@@ -18969,7 +18969,7 @@
           </a:solidFill>
           <a:ln w="25400">
             <a:solidFill>
-              <a:srgbClr val="B45309"/>
+              <a:srgbClr val="B91C1C"/>
             </a:solidFill>
           </a:ln>
           <a:effectLst/>
@@ -19013,7 +19013,7 @@
             </a:avLst>
           </a:prstGeom>
           <a:solidFill>
-            <a:srgbClr val="B45309"/>
+            <a:srgbClr val="B91C1C"/>
           </a:solidFill>
           <a:ln>
             <a:noFill/>
@@ -19199,7 +19199,7 @@
             </a:avLst>
           </a:prstGeom>
           <a:solidFill>
-            <a:srgbClr val="FFFBEB"/>
+            <a:srgbClr val="FEF2F2"/>
           </a:solidFill>
           <a:ln>
             <a:noFill/>
@@ -19254,7 +19254,7 @@
             <a:r>
               <a:rPr sz="900" b="1">
                 <a:solidFill>
-                  <a:srgbClr val="B45309"/>
+                  <a:srgbClr val="B91C1C"/>
                 </a:solidFill>
                 <a:latin typeface="Calibri"/>
               </a:rPr>
@@ -19289,7 +19289,7 @@
             <a:r>
               <a:rPr sz="1400" b="1">
                 <a:solidFill>
-                  <a:srgbClr val="92400E"/>
+                  <a:srgbClr val="991B1B"/>
                 </a:solidFill>
                 <a:latin typeface="Calibri"/>
               </a:rPr>
@@ -19834,7 +19834,7 @@
             <a:avLst/>
           </a:prstGeom>
           <a:solidFill>
-            <a:srgbClr val="B45309"/>
+            <a:srgbClr val="B91C1C"/>
           </a:solidFill>
           <a:ln>
             <a:noFill/>
@@ -19889,7 +19889,7 @@
             <a:r>
               <a:rPr sz="1000" b="1">
                 <a:solidFill>
-                  <a:srgbClr val="B45309"/>
+                  <a:srgbClr val="B91C1C"/>
                 </a:solidFill>
                 <a:latin typeface="Calibri"/>
               </a:rPr>
@@ -20252,7 +20252,7 @@
             </a:avLst>
           </a:prstGeom>
           <a:solidFill>
-            <a:srgbClr val="FFFBEB"/>
+            <a:srgbClr val="FEF2F2"/>
           </a:solidFill>
           <a:ln>
             <a:noFill/>
@@ -20307,7 +20307,7 @@
             <a:r>
               <a:rPr sz="1000" b="1">
                 <a:solidFill>
-                  <a:srgbClr val="B45309"/>
+                  <a:srgbClr val="B91C1C"/>
                 </a:solidFill>
                 <a:latin typeface="Calibri"/>
               </a:rPr>
@@ -20342,7 +20342,7 @@
             <a:r>
               <a:rPr sz="1400" b="1">
                 <a:solidFill>
-                  <a:srgbClr val="B45309"/>
+                  <a:srgbClr val="B91C1C"/>
                 </a:solidFill>
                 <a:latin typeface="Calibri"/>
               </a:rPr>
@@ -21165,7 +21165,7 @@
             <a:avLst/>
           </a:prstGeom>
           <a:solidFill>
-            <a:srgbClr val="B45309"/>
+            <a:srgbClr val="B91C1C"/>
           </a:solidFill>
           <a:ln>
             <a:noFill/>
@@ -21220,7 +21220,7 @@
             <a:r>
               <a:rPr sz="1100" b="1">
                 <a:solidFill>
-                  <a:srgbClr val="B45309"/>
+                  <a:srgbClr val="B91C1C"/>
                 </a:solidFill>
                 <a:latin typeface="Calibri"/>
               </a:rPr>
@@ -21244,7 +21244,7 @@
             <a:avLst/>
           </a:prstGeom>
           <a:solidFill>
-            <a:srgbClr val="B45309"/>
+            <a:srgbClr val="B91C1C"/>
           </a:solidFill>
           <a:ln>
             <a:noFill/>
@@ -21322,7 +21322,7 @@
             <a:avLst/>
           </a:prstGeom>
           <a:solidFill>
-            <a:srgbClr val="B45309"/>
+            <a:srgbClr val="B91C1C"/>
           </a:solidFill>
           <a:ln>
             <a:noFill/>
@@ -21400,7 +21400,7 @@
             <a:avLst/>
           </a:prstGeom>
           <a:solidFill>
-            <a:srgbClr val="B45309"/>
+            <a:srgbClr val="B91C1C"/>
           </a:solidFill>
           <a:ln>
             <a:noFill/>
@@ -21478,7 +21478,7 @@
             <a:avLst/>
           </a:prstGeom>
           <a:solidFill>
-            <a:srgbClr val="B45309"/>
+            <a:srgbClr val="B91C1C"/>
           </a:solidFill>
           <a:ln>
             <a:noFill/>
@@ -21556,7 +21556,7 @@
             <a:avLst/>
           </a:prstGeom>
           <a:solidFill>
-            <a:srgbClr val="B45309"/>
+            <a:srgbClr val="B91C1C"/>
           </a:solidFill>
           <a:ln>
             <a:noFill/>
@@ -21634,7 +21634,7 @@
             <a:avLst/>
           </a:prstGeom>
           <a:solidFill>
-            <a:srgbClr val="B45309"/>
+            <a:srgbClr val="B91C1C"/>
           </a:solidFill>
           <a:ln>
             <a:noFill/>
@@ -21712,7 +21712,7 @@
             <a:avLst/>
           </a:prstGeom>
           <a:solidFill>
-            <a:srgbClr val="B45309"/>
+            <a:srgbClr val="B91C1C"/>
           </a:solidFill>
           <a:ln>
             <a:noFill/>
@@ -21790,7 +21790,7 @@
             <a:avLst/>
           </a:prstGeom>
           <a:solidFill>
-            <a:srgbClr val="B45309"/>
+            <a:srgbClr val="B91C1C"/>
           </a:solidFill>
           <a:ln>
             <a:noFill/>
